--- a/public/lessons/year-6-maths/autumn/week-5/find-common-multiples/teaching-powerpoint-v1.pptx
+++ b/public/lessons/year-6-maths/autumn/week-5/find-common-multiples/teaching-powerpoint-v1.pptx
@@ -2,24 +2,24 @@
 <file path=ppt/presentation.xml><?xml version="1.0" encoding="utf-8"?>
 <p:presentation xmlns:p="http://schemas.openxmlformats.org/presentationml/2006/main">
   <p:sldMasterIdLst>
-    <p:sldMasterId xmlns:r="http://schemas.openxmlformats.org/officeDocument/2006/relationships" id="2147483648" r:id="R9174ee580f194702"/>
+    <p:sldMasterId xmlns:r="http://schemas.openxmlformats.org/officeDocument/2006/relationships" id="2147483648" r:id="R3344790bd31f4419"/>
   </p:sldMasterIdLst>
   <p:notesMasterIdLst>
-    <p:notesMasterId xmlns:r="http://schemas.openxmlformats.org/officeDocument/2006/relationships" r:id="R5b45f1237c264fe6"/>
+    <p:notesMasterId xmlns:r="http://schemas.openxmlformats.org/officeDocument/2006/relationships" r:id="R4f9f84c5dbed4d03"/>
   </p:notesMasterIdLst>
   <p:sldIdLst>
-    <p:sldId xmlns:r="http://schemas.openxmlformats.org/officeDocument/2006/relationships" id="256" r:id="R2e600ecc6ce94c64"/>
-    <p:sldId xmlns:r="http://schemas.openxmlformats.org/officeDocument/2006/relationships" id="257" r:id="Ree6b93cfca5b49cd"/>
-    <p:sldId xmlns:r="http://schemas.openxmlformats.org/officeDocument/2006/relationships" id="258" r:id="Rf41e96c759154ac3"/>
-    <p:sldId xmlns:r="http://schemas.openxmlformats.org/officeDocument/2006/relationships" id="259" r:id="R8745149e5e584330"/>
-    <p:sldId xmlns:r="http://schemas.openxmlformats.org/officeDocument/2006/relationships" id="260" r:id="R2bd7919d256d4f0e"/>
-    <p:sldId xmlns:r="http://schemas.openxmlformats.org/officeDocument/2006/relationships" id="261" r:id="R7093a05081fe4c90"/>
-    <p:sldId xmlns:r="http://schemas.openxmlformats.org/officeDocument/2006/relationships" id="262" r:id="R21bb18776af44353"/>
-    <p:sldId xmlns:r="http://schemas.openxmlformats.org/officeDocument/2006/relationships" id="263" r:id="R72a6fab031d64d7a"/>
-    <p:sldId xmlns:r="http://schemas.openxmlformats.org/officeDocument/2006/relationships" id="264" r:id="Re6cd606782114b8b"/>
-    <p:sldId xmlns:r="http://schemas.openxmlformats.org/officeDocument/2006/relationships" id="265" r:id="Re33e0a75a0b04f1a"/>
-    <p:sldId xmlns:r="http://schemas.openxmlformats.org/officeDocument/2006/relationships" id="266" r:id="R8758fbb3fb1f4524"/>
-    <p:sldId xmlns:r="http://schemas.openxmlformats.org/officeDocument/2006/relationships" id="267" r:id="Rf6765d1537b54419"/>
+    <p:sldId xmlns:r="http://schemas.openxmlformats.org/officeDocument/2006/relationships" id="256" r:id="R9ff0fbf50dee49f5"/>
+    <p:sldId xmlns:r="http://schemas.openxmlformats.org/officeDocument/2006/relationships" id="257" r:id="R4e460c51f1124492"/>
+    <p:sldId xmlns:r="http://schemas.openxmlformats.org/officeDocument/2006/relationships" id="258" r:id="Rd2b04406353641b3"/>
+    <p:sldId xmlns:r="http://schemas.openxmlformats.org/officeDocument/2006/relationships" id="259" r:id="Re3304ae8a5034f87"/>
+    <p:sldId xmlns:r="http://schemas.openxmlformats.org/officeDocument/2006/relationships" id="260" r:id="Ra9ea45d443004b96"/>
+    <p:sldId xmlns:r="http://schemas.openxmlformats.org/officeDocument/2006/relationships" id="261" r:id="R71c717e7d2fa4bd0"/>
+    <p:sldId xmlns:r="http://schemas.openxmlformats.org/officeDocument/2006/relationships" id="262" r:id="R852fe74b355f4785"/>
+    <p:sldId xmlns:r="http://schemas.openxmlformats.org/officeDocument/2006/relationships" id="263" r:id="R30500b7a32be426a"/>
+    <p:sldId xmlns:r="http://schemas.openxmlformats.org/officeDocument/2006/relationships" id="264" r:id="R4021b0bba7aa4c3f"/>
+    <p:sldId xmlns:r="http://schemas.openxmlformats.org/officeDocument/2006/relationships" id="265" r:id="Rcc2557b763bd4e08"/>
+    <p:sldId xmlns:r="http://schemas.openxmlformats.org/officeDocument/2006/relationships" id="266" r:id="R6bfcc3c292044308"/>
+    <p:sldId xmlns:r="http://schemas.openxmlformats.org/officeDocument/2006/relationships" id="267" r:id="R7f96c5dffa4a453a"/>
   </p:sldIdLst>
   <p:sldSz cx="12192000" cy="6858000"/>
   <p:notesSz cx="6858000" cy="9144000"/>
@@ -873,7 +873,7 @@
           <a:lstStyle xmlns:a="http://schemas.openxmlformats.org/drawingml/2006/main"/>
           <a:p xmlns:a="http://schemas.openxmlformats.org/drawingml/2006/main">
             <a:r>
-              <a:t>I do. Reveal the question, setup and each calculation stage one click at a time. Pupils watch before copying. Model answer: 72.</a:t>
+              <a:t>I do. Reveal the question, then reveal each mathematical change one click at a time. Point to the numbers and operation that changed before moving to the next line. Final answer: 72.</a:t>
             </a:r>
           </a:p>
         </p:txBody>
@@ -1291,7 +1291,7 @@
   </p:cSld>
   <p:clrMap bg1="lt1" tx1="dk1" bg2="lt2" tx2="dk2" accent1="accent1" accent2="accent2" accent3="accent3" accent4="accent4" accent5="accent5" accent6="accent6" hlink="hlink" folHlink="folHlink"/>
   <p:sldLayoutIdLst>
-    <p:sldLayoutId xmlns:r="http://schemas.openxmlformats.org/officeDocument/2006/relationships" id="2147483649" r:id="R6b29448d3bc14942"/>
+    <p:sldLayoutId xmlns:r="http://schemas.openxmlformats.org/officeDocument/2006/relationships" id="2147483649" r:id="Rabffe4e73c8347f2"/>
   </p:sldLayoutIdLst>
   <p:txStyles>
     <p:titleStyle>
@@ -1842,7 +1842,7 @@
           <p:cNvPr id="12" name="">
             <a:extLst xmlns:a="http://schemas.openxmlformats.org/drawingml/2006/main">
               <a:ext uri="{FF2B5EF4-FFF2-40B4-BE49-F238E27FC236}">
-                <a16:creationId xmlns:a16="http://schemas.microsoft.com/office/drawing/2014/main" id="{22B66AA2-B664-45C9-850F-C940F409B822}"/>
+                <a16:creationId xmlns:a16="http://schemas.microsoft.com/office/drawing/2014/main" id="{B5DB6298-C0A0-40C4-BFB7-54A7355BF5E2}"/>
               </a:ext>
             </a:extLst>
           </p:cNvPr>
@@ -1874,7 +1874,7 @@
           <p:cNvPr id="2" name="">
             <a:extLst xmlns:a="http://schemas.openxmlformats.org/drawingml/2006/main">
               <a:ext uri="{FF2B5EF4-FFF2-40B4-BE49-F238E27FC236}">
-                <a16:creationId xmlns:a16="http://schemas.microsoft.com/office/drawing/2014/main" id="{C9519FB2-9B60-4A53-9E47-757A1D558A4A}"/>
+                <a16:creationId xmlns:a16="http://schemas.microsoft.com/office/drawing/2014/main" id="{A4EED36D-EFF3-47B5-AB9B-FA9D06F96FAF}"/>
               </a:ext>
             </a:extLst>
           </p:cNvPr>
@@ -1931,7 +1931,7 @@
           <p:cNvPr id="3" name="">
             <a:extLst xmlns:a="http://schemas.openxmlformats.org/drawingml/2006/main">
               <a:ext uri="{FF2B5EF4-FFF2-40B4-BE49-F238E27FC236}">
-                <a16:creationId xmlns:a16="http://schemas.microsoft.com/office/drawing/2014/main" id="{1BA66DD1-BACB-4059-979B-E7C84941AAC2}"/>
+                <a16:creationId xmlns:a16="http://schemas.microsoft.com/office/drawing/2014/main" id="{1BFBCE91-08D2-413B-8025-7D3F59468D7F}"/>
               </a:ext>
             </a:extLst>
           </p:cNvPr>
@@ -1965,7 +1965,7 @@
           <p:cNvPr id="4" name="">
             <a:extLst xmlns:a="http://schemas.openxmlformats.org/drawingml/2006/main">
               <a:ext uri="{FF2B5EF4-FFF2-40B4-BE49-F238E27FC236}">
-                <a16:creationId xmlns:a16="http://schemas.microsoft.com/office/drawing/2014/main" id="{F681CE6A-29FB-4BBA-A401-079DC2028C30}"/>
+                <a16:creationId xmlns:a16="http://schemas.microsoft.com/office/drawing/2014/main" id="{A6F185B6-6885-46C5-B3BA-73B03A702516}"/>
               </a:ext>
             </a:extLst>
           </p:cNvPr>
@@ -2022,7 +2022,7 @@
           <p:cNvPr id="5" name="">
             <a:extLst xmlns:a="http://schemas.openxmlformats.org/drawingml/2006/main">
               <a:ext uri="{FF2B5EF4-FFF2-40B4-BE49-F238E27FC236}">
-                <a16:creationId xmlns:a16="http://schemas.microsoft.com/office/drawing/2014/main" id="{9A0AE0EA-D50F-4688-A719-4EBA07E0E1CD}"/>
+                <a16:creationId xmlns:a16="http://schemas.microsoft.com/office/drawing/2014/main" id="{2B63E6B7-060C-44A1-9A2B-2A8004E183B6}"/>
               </a:ext>
             </a:extLst>
           </p:cNvPr>
@@ -2079,7 +2079,7 @@
           <p:cNvPr id="6" name="">
             <a:extLst xmlns:a="http://schemas.openxmlformats.org/drawingml/2006/main">
               <a:ext uri="{FF2B5EF4-FFF2-40B4-BE49-F238E27FC236}">
-                <a16:creationId xmlns:a16="http://schemas.microsoft.com/office/drawing/2014/main" id="{B154B989-3050-4EF8-8CE2-817119811DBC}"/>
+                <a16:creationId xmlns:a16="http://schemas.microsoft.com/office/drawing/2014/main" id="{08C62044-36EB-4894-AAC2-E8B77E0E559E}"/>
               </a:ext>
             </a:extLst>
           </p:cNvPr>
@@ -2113,7 +2113,7 @@
           <p:cNvPr id="7" name="">
             <a:extLst xmlns:a="http://schemas.openxmlformats.org/drawingml/2006/main">
               <a:ext uri="{FF2B5EF4-FFF2-40B4-BE49-F238E27FC236}">
-                <a16:creationId xmlns:a16="http://schemas.microsoft.com/office/drawing/2014/main" id="{CE8F2C2D-3676-4855-9E50-E9FDA3323C39}"/>
+                <a16:creationId xmlns:a16="http://schemas.microsoft.com/office/drawing/2014/main" id="{B3C8AD9B-ABA8-4C5C-B9E2-197C57B35554}"/>
               </a:ext>
             </a:extLst>
           </p:cNvPr>
@@ -2170,7 +2170,7 @@
           <p:cNvPr id="8" name="">
             <a:extLst xmlns:a="http://schemas.openxmlformats.org/drawingml/2006/main">
               <a:ext uri="{FF2B5EF4-FFF2-40B4-BE49-F238E27FC236}">
-                <a16:creationId xmlns:a16="http://schemas.microsoft.com/office/drawing/2014/main" id="{5DC4EBD8-D4E7-473F-8693-3CDCB0BD9748}"/>
+                <a16:creationId xmlns:a16="http://schemas.microsoft.com/office/drawing/2014/main" id="{5C665690-1B3E-4BF9-A4CE-91656B6EF91F}"/>
               </a:ext>
             </a:extLst>
           </p:cNvPr>
@@ -2227,7 +2227,7 @@
           <p:cNvPr id="9" name="">
             <a:extLst xmlns:a="http://schemas.openxmlformats.org/drawingml/2006/main">
               <a:ext uri="{FF2B5EF4-FFF2-40B4-BE49-F238E27FC236}">
-                <a16:creationId xmlns:a16="http://schemas.microsoft.com/office/drawing/2014/main" id="{3E4B6817-3C61-41E6-A5BF-500B053BFB9A}"/>
+                <a16:creationId xmlns:a16="http://schemas.microsoft.com/office/drawing/2014/main" id="{8675B5FD-6601-470B-97BA-1910D1F7F078}"/>
               </a:ext>
             </a:extLst>
           </p:cNvPr>
@@ -2284,7 +2284,7 @@
           <p:cNvPr id="10" name="">
             <a:extLst xmlns:a="http://schemas.openxmlformats.org/drawingml/2006/main">
               <a:ext uri="{FF2B5EF4-FFF2-40B4-BE49-F238E27FC236}">
-                <a16:creationId xmlns:a16="http://schemas.microsoft.com/office/drawing/2014/main" id="{81065609-8DF7-48EB-A938-1C510D830FF3}"/>
+                <a16:creationId xmlns:a16="http://schemas.microsoft.com/office/drawing/2014/main" id="{67EF61A9-8124-480A-A3B6-21B80A9E3933}"/>
               </a:ext>
             </a:extLst>
           </p:cNvPr>
@@ -2341,7 +2341,7 @@
           <p:cNvPr id="11" name="">
             <a:extLst xmlns:a="http://schemas.openxmlformats.org/drawingml/2006/main">
               <a:ext uri="{FF2B5EF4-FFF2-40B4-BE49-F238E27FC236}">
-                <a16:creationId xmlns:a16="http://schemas.microsoft.com/office/drawing/2014/main" id="{E0631370-A2D8-479C-A29E-F2BBDBB90D91}"/>
+                <a16:creationId xmlns:a16="http://schemas.microsoft.com/office/drawing/2014/main" id="{48911C19-1953-4CAD-B730-F8905F04A7F3}"/>
               </a:ext>
             </a:extLst>
           </p:cNvPr>
@@ -2396,7 +2396,7 @@
     </p:spTree>
     <p:extLst>
       <p:ext uri="{BB962C8B-B14F-4D97-AF65-F5344CB8AC3E}">
-        <p14:creationId xmlns:p14="http://schemas.microsoft.com/office/powerpoint/2010/main" val="322180546"/>
+        <p14:creationId xmlns:p14="http://schemas.microsoft.com/office/powerpoint/2010/main" val="111103537"/>
       </p:ext>
     </p:extLst>
   </p:cSld>
@@ -2427,7 +2427,7 @@
           <p:cNvPr id="14" name="">
             <a:extLst xmlns:a="http://schemas.openxmlformats.org/drawingml/2006/main">
               <a:ext uri="{FF2B5EF4-FFF2-40B4-BE49-F238E27FC236}">
-                <a16:creationId xmlns:a16="http://schemas.microsoft.com/office/drawing/2014/main" id="{0DA332D9-3626-404C-BBB6-4FF63EBD022F}"/>
+                <a16:creationId xmlns:a16="http://schemas.microsoft.com/office/drawing/2014/main" id="{E54E3186-BED9-4523-9E3F-A61132B97DA9}"/>
               </a:ext>
             </a:extLst>
           </p:cNvPr>
@@ -2459,7 +2459,7 @@
           <p:cNvPr id="2" name="">
             <a:extLst xmlns:a="http://schemas.openxmlformats.org/drawingml/2006/main">
               <a:ext uri="{FF2B5EF4-FFF2-40B4-BE49-F238E27FC236}">
-                <a16:creationId xmlns:a16="http://schemas.microsoft.com/office/drawing/2014/main" id="{47E0D832-D64A-46E0-9EC1-968E0162C277}"/>
+                <a16:creationId xmlns:a16="http://schemas.microsoft.com/office/drawing/2014/main" id="{86178870-A7D8-4126-BBD2-2E677F205CF5}"/>
               </a:ext>
             </a:extLst>
           </p:cNvPr>
@@ -2516,7 +2516,7 @@
           <p:cNvPr id="3" name="">
             <a:extLst xmlns:a="http://schemas.openxmlformats.org/drawingml/2006/main">
               <a:ext uri="{FF2B5EF4-FFF2-40B4-BE49-F238E27FC236}">
-                <a16:creationId xmlns:a16="http://schemas.microsoft.com/office/drawing/2014/main" id="{4BF551A6-A0CE-4C57-865F-3B8D470AB225}"/>
+                <a16:creationId xmlns:a16="http://schemas.microsoft.com/office/drawing/2014/main" id="{44504ED5-416E-4CA7-8138-6E815573F45A}"/>
               </a:ext>
             </a:extLst>
           </p:cNvPr>
@@ -2548,7 +2548,7 @@
           <p:cNvPr id="4" name="">
             <a:extLst xmlns:a="http://schemas.openxmlformats.org/drawingml/2006/main">
               <a:ext uri="{FF2B5EF4-FFF2-40B4-BE49-F238E27FC236}">
-                <a16:creationId xmlns:a16="http://schemas.microsoft.com/office/drawing/2014/main" id="{962CEE0E-C424-480B-A783-94983A6974C1}"/>
+                <a16:creationId xmlns:a16="http://schemas.microsoft.com/office/drawing/2014/main" id="{DB4F0525-48B2-459B-9106-9213C1D663BB}"/>
               </a:ext>
             </a:extLst>
           </p:cNvPr>
@@ -2605,7 +2605,7 @@
           <p:cNvPr id="5" name="">
             <a:extLst xmlns:a="http://schemas.openxmlformats.org/drawingml/2006/main">
               <a:ext uri="{FF2B5EF4-FFF2-40B4-BE49-F238E27FC236}">
-                <a16:creationId xmlns:a16="http://schemas.microsoft.com/office/drawing/2014/main" id="{C14125B7-4EB6-4539-999C-E91EEDD354E6}"/>
+                <a16:creationId xmlns:a16="http://schemas.microsoft.com/office/drawing/2014/main" id="{554949E3-59F2-42B5-85D5-93332CAC058F}"/>
               </a:ext>
             </a:extLst>
           </p:cNvPr>
@@ -2662,7 +2662,7 @@
           <p:cNvPr id="6" name="">
             <a:extLst xmlns:a="http://schemas.openxmlformats.org/drawingml/2006/main">
               <a:ext uri="{FF2B5EF4-FFF2-40B4-BE49-F238E27FC236}">
-                <a16:creationId xmlns:a16="http://schemas.microsoft.com/office/drawing/2014/main" id="{90C45D42-5771-4324-B2F2-1BACE8F2A528}"/>
+                <a16:creationId xmlns:a16="http://schemas.microsoft.com/office/drawing/2014/main" id="{687F1076-84F5-4300-8579-9F2CE2203656}"/>
               </a:ext>
             </a:extLst>
           </p:cNvPr>
@@ -2719,7 +2719,7 @@
           <p:cNvPr id="7" name="">
             <a:extLst xmlns:a="http://schemas.openxmlformats.org/drawingml/2006/main">
               <a:ext uri="{FF2B5EF4-FFF2-40B4-BE49-F238E27FC236}">
-                <a16:creationId xmlns:a16="http://schemas.microsoft.com/office/drawing/2014/main" id="{DFA90BB2-B935-4A72-8E69-EB33F096E801}"/>
+                <a16:creationId xmlns:a16="http://schemas.microsoft.com/office/drawing/2014/main" id="{D54ED6D1-5DB2-469C-B71B-DD3B70CF40FD}"/>
               </a:ext>
             </a:extLst>
           </p:cNvPr>
@@ -2751,7 +2751,7 @@
           <p:cNvPr id="8" name="">
             <a:extLst xmlns:a="http://schemas.openxmlformats.org/drawingml/2006/main">
               <a:ext uri="{FF2B5EF4-FFF2-40B4-BE49-F238E27FC236}">
-                <a16:creationId xmlns:a16="http://schemas.microsoft.com/office/drawing/2014/main" id="{0B77E628-6A7C-4421-93B9-4FBB31902A46}"/>
+                <a16:creationId xmlns:a16="http://schemas.microsoft.com/office/drawing/2014/main" id="{EF76E38F-51D0-46BD-8C74-B386C238E90F}"/>
               </a:ext>
             </a:extLst>
           </p:cNvPr>
@@ -2808,7 +2808,7 @@
           <p:cNvPr id="9" name="">
             <a:extLst xmlns:a="http://schemas.openxmlformats.org/drawingml/2006/main">
               <a:ext uri="{FF2B5EF4-FFF2-40B4-BE49-F238E27FC236}">
-                <a16:creationId xmlns:a16="http://schemas.microsoft.com/office/drawing/2014/main" id="{EAB6403B-3825-4201-A6D6-B8A9B1E337FD}"/>
+                <a16:creationId xmlns:a16="http://schemas.microsoft.com/office/drawing/2014/main" id="{84B6C96B-A1BF-4A83-92E9-ADC207798040}"/>
               </a:ext>
             </a:extLst>
           </p:cNvPr>
@@ -2865,7 +2865,7 @@
           <p:cNvPr id="10" name="">
             <a:extLst xmlns:a="http://schemas.openxmlformats.org/drawingml/2006/main">
               <a:ext uri="{FF2B5EF4-FFF2-40B4-BE49-F238E27FC236}">
-                <a16:creationId xmlns:a16="http://schemas.microsoft.com/office/drawing/2014/main" id="{396F7C41-5FB6-4FC6-92CE-A04524754DDE}"/>
+                <a16:creationId xmlns:a16="http://schemas.microsoft.com/office/drawing/2014/main" id="{CD7995D7-B445-4BBF-B8F0-C6B3BC394006}"/>
               </a:ext>
             </a:extLst>
           </p:cNvPr>
@@ -2922,7 +2922,7 @@
           <p:cNvPr id="11" name="">
             <a:extLst xmlns:a="http://schemas.openxmlformats.org/drawingml/2006/main">
               <a:ext uri="{FF2B5EF4-FFF2-40B4-BE49-F238E27FC236}">
-                <a16:creationId xmlns:a16="http://schemas.microsoft.com/office/drawing/2014/main" id="{A964F23F-D0C5-4B25-9D6B-196AAA3D1EEE}"/>
+                <a16:creationId xmlns:a16="http://schemas.microsoft.com/office/drawing/2014/main" id="{C3B3B0BB-DAA7-4A84-B7A8-6C18C0FC72E3}"/>
               </a:ext>
             </a:extLst>
           </p:cNvPr>
@@ -2979,7 +2979,7 @@
           <p:cNvPr id="12" name="">
             <a:extLst xmlns:a="http://schemas.openxmlformats.org/drawingml/2006/main">
               <a:ext uri="{FF2B5EF4-FFF2-40B4-BE49-F238E27FC236}">
-                <a16:creationId xmlns:a16="http://schemas.microsoft.com/office/drawing/2014/main" id="{710A5B37-87A3-470A-93DD-4A67D7396B89}"/>
+                <a16:creationId xmlns:a16="http://schemas.microsoft.com/office/drawing/2014/main" id="{ABB9193B-390B-47AB-A52D-4C295F2D60C8}"/>
               </a:ext>
             </a:extLst>
           </p:cNvPr>
@@ -3036,7 +3036,7 @@
           <p:cNvPr id="13" name="">
             <a:extLst xmlns:a="http://schemas.openxmlformats.org/drawingml/2006/main">
               <a:ext uri="{FF2B5EF4-FFF2-40B4-BE49-F238E27FC236}">
-                <a16:creationId xmlns:a16="http://schemas.microsoft.com/office/drawing/2014/main" id="{023DFDC4-9D46-4F12-9957-8D9C33ADFCA7}"/>
+                <a16:creationId xmlns:a16="http://schemas.microsoft.com/office/drawing/2014/main" id="{DE96C298-34D8-4B81-A531-B548F6919C07}"/>
               </a:ext>
             </a:extLst>
           </p:cNvPr>
@@ -3091,7 +3091,7 @@
     </p:spTree>
     <p:extLst>
       <p:ext uri="{BB962C8B-B14F-4D97-AF65-F5344CB8AC3E}">
-        <p14:creationId xmlns:p14="http://schemas.microsoft.com/office/powerpoint/2010/main" val="1514057659"/>
+        <p14:creationId xmlns:p14="http://schemas.microsoft.com/office/powerpoint/2010/main" val="27318511"/>
       </p:ext>
     </p:extLst>
   </p:cSld>
@@ -3292,7 +3292,7 @@
           <p:cNvPr id="19" name="">
             <a:extLst xmlns:a="http://schemas.openxmlformats.org/drawingml/2006/main">
               <a:ext uri="{FF2B5EF4-FFF2-40B4-BE49-F238E27FC236}">
-                <a16:creationId xmlns:a16="http://schemas.microsoft.com/office/drawing/2014/main" id="{81C19F3C-4D1F-4E28-B1EF-7BDA86CFAFD9}"/>
+                <a16:creationId xmlns:a16="http://schemas.microsoft.com/office/drawing/2014/main" id="{AF166EE4-71F1-4D8F-9924-CC0B7636AAA7}"/>
               </a:ext>
             </a:extLst>
           </p:cNvPr>
@@ -3324,7 +3324,7 @@
           <p:cNvPr id="2" name="">
             <a:extLst xmlns:a="http://schemas.openxmlformats.org/drawingml/2006/main">
               <a:ext uri="{FF2B5EF4-FFF2-40B4-BE49-F238E27FC236}">
-                <a16:creationId xmlns:a16="http://schemas.microsoft.com/office/drawing/2014/main" id="{B68E4A0C-DE5D-4AF5-91EB-0FDF6349DF2D}"/>
+                <a16:creationId xmlns:a16="http://schemas.microsoft.com/office/drawing/2014/main" id="{A3E0186A-63AC-4C94-B65F-0D556B423FBA}"/>
               </a:ext>
             </a:extLst>
           </p:cNvPr>
@@ -3381,7 +3381,7 @@
           <p:cNvPr id="3" name="">
             <a:extLst xmlns:a="http://schemas.openxmlformats.org/drawingml/2006/main">
               <a:ext uri="{FF2B5EF4-FFF2-40B4-BE49-F238E27FC236}">
-                <a16:creationId xmlns:a16="http://schemas.microsoft.com/office/drawing/2014/main" id="{5AC53CC9-CF06-4329-A8A4-B0A2BE9CBE3A}"/>
+                <a16:creationId xmlns:a16="http://schemas.microsoft.com/office/drawing/2014/main" id="{0A74FE64-0C2E-48CD-AEA3-4E9261E09799}"/>
               </a:ext>
             </a:extLst>
           </p:cNvPr>
@@ -3413,7 +3413,7 @@
           <p:cNvPr id="4" name="">
             <a:extLst xmlns:a="http://schemas.openxmlformats.org/drawingml/2006/main">
               <a:ext uri="{FF2B5EF4-FFF2-40B4-BE49-F238E27FC236}">
-                <a16:creationId xmlns:a16="http://schemas.microsoft.com/office/drawing/2014/main" id="{C50C04E4-6747-4A84-9489-1279DF565844}"/>
+                <a16:creationId xmlns:a16="http://schemas.microsoft.com/office/drawing/2014/main" id="{B2D96063-A7A3-4709-B515-14B85A776D9F}"/>
               </a:ext>
             </a:extLst>
           </p:cNvPr>
@@ -3470,7 +3470,7 @@
           <p:cNvPr id="5" name="">
             <a:extLst xmlns:a="http://schemas.openxmlformats.org/drawingml/2006/main">
               <a:ext uri="{FF2B5EF4-FFF2-40B4-BE49-F238E27FC236}">
-                <a16:creationId xmlns:a16="http://schemas.microsoft.com/office/drawing/2014/main" id="{0F5AE885-8663-46AD-80FB-E937332F9159}"/>
+                <a16:creationId xmlns:a16="http://schemas.microsoft.com/office/drawing/2014/main" id="{AC3FA295-C6EC-4E90-B33B-45F5381E4349}"/>
               </a:ext>
             </a:extLst>
           </p:cNvPr>
@@ -3527,7 +3527,7 @@
           <p:cNvPr id="6" name="">
             <a:extLst xmlns:a="http://schemas.openxmlformats.org/drawingml/2006/main">
               <a:ext uri="{FF2B5EF4-FFF2-40B4-BE49-F238E27FC236}">
-                <a16:creationId xmlns:a16="http://schemas.microsoft.com/office/drawing/2014/main" id="{FD791980-3857-47CF-8F52-3BC458B9E783}"/>
+                <a16:creationId xmlns:a16="http://schemas.microsoft.com/office/drawing/2014/main" id="{DA422E9E-06AB-4026-8C51-E8AF3EA532CC}"/>
               </a:ext>
             </a:extLst>
           </p:cNvPr>
@@ -3584,7 +3584,7 @@
           <p:cNvPr id="7" name="">
             <a:extLst xmlns:a="http://schemas.openxmlformats.org/drawingml/2006/main">
               <a:ext uri="{FF2B5EF4-FFF2-40B4-BE49-F238E27FC236}">
-                <a16:creationId xmlns:a16="http://schemas.microsoft.com/office/drawing/2014/main" id="{0EB4ACDA-1A1B-4CF3-801B-C05888E60A11}"/>
+                <a16:creationId xmlns:a16="http://schemas.microsoft.com/office/drawing/2014/main" id="{70E8C787-582E-4E7B-98D6-FAEA4264D5C0}"/>
               </a:ext>
             </a:extLst>
           </p:cNvPr>
@@ -3616,7 +3616,7 @@
           <p:cNvPr id="8" name="">
             <a:extLst xmlns:a="http://schemas.openxmlformats.org/drawingml/2006/main">
               <a:ext uri="{FF2B5EF4-FFF2-40B4-BE49-F238E27FC236}">
-                <a16:creationId xmlns:a16="http://schemas.microsoft.com/office/drawing/2014/main" id="{CCE6B17A-515F-47FC-884E-F5693452CD67}"/>
+                <a16:creationId xmlns:a16="http://schemas.microsoft.com/office/drawing/2014/main" id="{29F07041-7830-4F0F-A5C7-98E6F3C0DFDB}"/>
               </a:ext>
             </a:extLst>
           </p:cNvPr>
@@ -3673,7 +3673,7 @@
           <p:cNvPr id="9" name="">
             <a:extLst xmlns:a="http://schemas.openxmlformats.org/drawingml/2006/main">
               <a:ext uri="{FF2B5EF4-FFF2-40B4-BE49-F238E27FC236}">
-                <a16:creationId xmlns:a16="http://schemas.microsoft.com/office/drawing/2014/main" id="{E589D3CE-E123-4C85-8DF1-78C575692410}"/>
+                <a16:creationId xmlns:a16="http://schemas.microsoft.com/office/drawing/2014/main" id="{65161CE1-A58A-4D94-85FC-072F1652C583}"/>
               </a:ext>
             </a:extLst>
           </p:cNvPr>
@@ -3730,7 +3730,7 @@
           <p:cNvPr id="10" name="">
             <a:extLst xmlns:a="http://schemas.openxmlformats.org/drawingml/2006/main">
               <a:ext uri="{FF2B5EF4-FFF2-40B4-BE49-F238E27FC236}">
-                <a16:creationId xmlns:a16="http://schemas.microsoft.com/office/drawing/2014/main" id="{022DF6F2-A787-4BDF-BD51-9634A8399A5E}"/>
+                <a16:creationId xmlns:a16="http://schemas.microsoft.com/office/drawing/2014/main" id="{9482B2CE-3FF3-418B-9E79-EF1A67325BEE}"/>
               </a:ext>
             </a:extLst>
           </p:cNvPr>
@@ -3787,7 +3787,7 @@
           <p:cNvPr id="11" name="">
             <a:extLst xmlns:a="http://schemas.openxmlformats.org/drawingml/2006/main">
               <a:ext uri="{FF2B5EF4-FFF2-40B4-BE49-F238E27FC236}">
-                <a16:creationId xmlns:a16="http://schemas.microsoft.com/office/drawing/2014/main" id="{9555BB1B-22A2-49D5-AF9D-7941F4367B60}"/>
+                <a16:creationId xmlns:a16="http://schemas.microsoft.com/office/drawing/2014/main" id="{90614DDF-F648-4C03-947B-6BB309A510BB}"/>
               </a:ext>
             </a:extLst>
           </p:cNvPr>
@@ -3821,7 +3821,7 @@
           <p:cNvPr id="12" name="">
             <a:extLst xmlns:a="http://schemas.openxmlformats.org/drawingml/2006/main">
               <a:ext uri="{FF2B5EF4-FFF2-40B4-BE49-F238E27FC236}">
-                <a16:creationId xmlns:a16="http://schemas.microsoft.com/office/drawing/2014/main" id="{646DD659-39C7-4D1C-8259-24E285220383}"/>
+                <a16:creationId xmlns:a16="http://schemas.microsoft.com/office/drawing/2014/main" id="{0BE08B16-D6D9-4CFD-A1B8-2443CCFCC628}"/>
               </a:ext>
             </a:extLst>
           </p:cNvPr>
@@ -3878,7 +3878,7 @@
           <p:cNvPr id="13" name="">
             <a:extLst xmlns:a="http://schemas.openxmlformats.org/drawingml/2006/main">
               <a:ext uri="{FF2B5EF4-FFF2-40B4-BE49-F238E27FC236}">
-                <a16:creationId xmlns:a16="http://schemas.microsoft.com/office/drawing/2014/main" id="{8755AB2C-1547-4032-9261-DB138B6533CF}"/>
+                <a16:creationId xmlns:a16="http://schemas.microsoft.com/office/drawing/2014/main" id="{C4C13313-CBC1-4C20-9E6E-972A604CC27D}"/>
               </a:ext>
             </a:extLst>
           </p:cNvPr>
@@ -3935,7 +3935,7 @@
           <p:cNvPr id="14" name="">
             <a:extLst xmlns:a="http://schemas.openxmlformats.org/drawingml/2006/main">
               <a:ext uri="{FF2B5EF4-FFF2-40B4-BE49-F238E27FC236}">
-                <a16:creationId xmlns:a16="http://schemas.microsoft.com/office/drawing/2014/main" id="{390BF66E-9B0D-41B6-B535-F1956241BEDB}"/>
+                <a16:creationId xmlns:a16="http://schemas.microsoft.com/office/drawing/2014/main" id="{C7AEBBF3-D280-4E03-B927-273BB7927CE0}"/>
               </a:ext>
             </a:extLst>
           </p:cNvPr>
@@ -3992,7 +3992,7 @@
           <p:cNvPr id="15" name="">
             <a:extLst xmlns:a="http://schemas.openxmlformats.org/drawingml/2006/main">
               <a:ext uri="{FF2B5EF4-FFF2-40B4-BE49-F238E27FC236}">
-                <a16:creationId xmlns:a16="http://schemas.microsoft.com/office/drawing/2014/main" id="{3710CCF8-DEFF-4133-B52A-F13A735CEA3B}"/>
+                <a16:creationId xmlns:a16="http://schemas.microsoft.com/office/drawing/2014/main" id="{DAB32EF2-34C0-4E8E-B96C-7076336A9316}"/>
               </a:ext>
             </a:extLst>
           </p:cNvPr>
@@ -4026,7 +4026,7 @@
           <p:cNvPr id="16" name="">
             <a:extLst xmlns:a="http://schemas.openxmlformats.org/drawingml/2006/main">
               <a:ext uri="{FF2B5EF4-FFF2-40B4-BE49-F238E27FC236}">
-                <a16:creationId xmlns:a16="http://schemas.microsoft.com/office/drawing/2014/main" id="{34630E00-5926-45A3-A33D-1304459612E7}"/>
+                <a16:creationId xmlns:a16="http://schemas.microsoft.com/office/drawing/2014/main" id="{3C2FD184-52C3-4C5F-ACB8-558047DBEDF5}"/>
               </a:ext>
             </a:extLst>
           </p:cNvPr>
@@ -4083,7 +4083,7 @@
           <p:cNvPr id="17" name="">
             <a:extLst xmlns:a="http://schemas.openxmlformats.org/drawingml/2006/main">
               <a:ext uri="{FF2B5EF4-FFF2-40B4-BE49-F238E27FC236}">
-                <a16:creationId xmlns:a16="http://schemas.microsoft.com/office/drawing/2014/main" id="{0D5C45AA-BA61-4857-98DB-28F4EF45DDCF}"/>
+                <a16:creationId xmlns:a16="http://schemas.microsoft.com/office/drawing/2014/main" id="{59A673AB-BEDD-48B6-B95A-9A43D471E73F}"/>
               </a:ext>
             </a:extLst>
           </p:cNvPr>
@@ -4140,7 +4140,7 @@
           <p:cNvPr id="18" name="">
             <a:extLst xmlns:a="http://schemas.openxmlformats.org/drawingml/2006/main">
               <a:ext uri="{FF2B5EF4-FFF2-40B4-BE49-F238E27FC236}">
-                <a16:creationId xmlns:a16="http://schemas.microsoft.com/office/drawing/2014/main" id="{CAD8029F-A929-461E-B54F-07AD636819A3}"/>
+                <a16:creationId xmlns:a16="http://schemas.microsoft.com/office/drawing/2014/main" id="{BB653D49-7DE0-4FC6-B3E6-B9CB28D70D98}"/>
               </a:ext>
             </a:extLst>
           </p:cNvPr>
@@ -4195,7 +4195,7 @@
     </p:spTree>
     <p:extLst>
       <p:ext uri="{BB962C8B-B14F-4D97-AF65-F5344CB8AC3E}">
-        <p14:creationId xmlns:p14="http://schemas.microsoft.com/office/powerpoint/2010/main" val="504394998"/>
+        <p14:creationId xmlns:p14="http://schemas.microsoft.com/office/powerpoint/2010/main" val="1728051775"/>
       </p:ext>
     </p:extLst>
   </p:cSld>
@@ -4350,7 +4350,7 @@
           <p:cNvPr id="23" name="">
             <a:extLst xmlns:a="http://schemas.openxmlformats.org/drawingml/2006/main">
               <a:ext uri="{FF2B5EF4-FFF2-40B4-BE49-F238E27FC236}">
-                <a16:creationId xmlns:a16="http://schemas.microsoft.com/office/drawing/2014/main" id="{BDC329B3-F9F7-492B-B5B5-1A3DD4B00806}"/>
+                <a16:creationId xmlns:a16="http://schemas.microsoft.com/office/drawing/2014/main" id="{79B9AA09-62BB-42F6-9D5D-B85F013AB75A}"/>
               </a:ext>
             </a:extLst>
           </p:cNvPr>
@@ -4382,7 +4382,7 @@
           <p:cNvPr id="2" name="">
             <a:extLst xmlns:a="http://schemas.openxmlformats.org/drawingml/2006/main">
               <a:ext uri="{FF2B5EF4-FFF2-40B4-BE49-F238E27FC236}">
-                <a16:creationId xmlns:a16="http://schemas.microsoft.com/office/drawing/2014/main" id="{01CEEBDF-A7C4-41CA-867B-7EC70D8CCDCA}"/>
+                <a16:creationId xmlns:a16="http://schemas.microsoft.com/office/drawing/2014/main" id="{FA2BC160-53C5-4C11-9CF6-0167B5E8A86F}"/>
               </a:ext>
             </a:extLst>
           </p:cNvPr>
@@ -4439,7 +4439,7 @@
           <p:cNvPr id="3" name="">
             <a:extLst xmlns:a="http://schemas.openxmlformats.org/drawingml/2006/main">
               <a:ext uri="{FF2B5EF4-FFF2-40B4-BE49-F238E27FC236}">
-                <a16:creationId xmlns:a16="http://schemas.microsoft.com/office/drawing/2014/main" id="{7DBF6C92-6873-4332-B2F4-07E98B4C4380}"/>
+                <a16:creationId xmlns:a16="http://schemas.microsoft.com/office/drawing/2014/main" id="{CE80DFE1-04DF-43FC-AB00-3B711D86249E}"/>
               </a:ext>
             </a:extLst>
           </p:cNvPr>
@@ -4471,7 +4471,7 @@
           <p:cNvPr id="4" name="">
             <a:extLst xmlns:a="http://schemas.openxmlformats.org/drawingml/2006/main">
               <a:ext uri="{FF2B5EF4-FFF2-40B4-BE49-F238E27FC236}">
-                <a16:creationId xmlns:a16="http://schemas.microsoft.com/office/drawing/2014/main" id="{D5A4AF14-DE6E-4A13-BC2E-0F52F4E9E1A6}"/>
+                <a16:creationId xmlns:a16="http://schemas.microsoft.com/office/drawing/2014/main" id="{5DD1E9C5-F26C-46B9-BFA1-7048F47EC20D}"/>
               </a:ext>
             </a:extLst>
           </p:cNvPr>
@@ -4528,7 +4528,7 @@
           <p:cNvPr id="5" name="">
             <a:extLst xmlns:a="http://schemas.openxmlformats.org/drawingml/2006/main">
               <a:ext uri="{FF2B5EF4-FFF2-40B4-BE49-F238E27FC236}">
-                <a16:creationId xmlns:a16="http://schemas.microsoft.com/office/drawing/2014/main" id="{A50C40F0-C2A6-4289-9CED-56BDD0687170}"/>
+                <a16:creationId xmlns:a16="http://schemas.microsoft.com/office/drawing/2014/main" id="{68B87D12-4B04-4969-BB60-121F26DFE2F8}"/>
               </a:ext>
             </a:extLst>
           </p:cNvPr>
@@ -4585,7 +4585,7 @@
           <p:cNvPr id="6" name="">
             <a:extLst xmlns:a="http://schemas.openxmlformats.org/drawingml/2006/main">
               <a:ext uri="{FF2B5EF4-FFF2-40B4-BE49-F238E27FC236}">
-                <a16:creationId xmlns:a16="http://schemas.microsoft.com/office/drawing/2014/main" id="{118A5C33-8AD9-48B8-A232-1BAE1E0A0DE2}"/>
+                <a16:creationId xmlns:a16="http://schemas.microsoft.com/office/drawing/2014/main" id="{DE238E73-1F94-41FF-8844-2616C8B8793C}"/>
               </a:ext>
             </a:extLst>
           </p:cNvPr>
@@ -4642,7 +4642,7 @@
           <p:cNvPr id="7" name="">
             <a:extLst xmlns:a="http://schemas.openxmlformats.org/drawingml/2006/main">
               <a:ext uri="{FF2B5EF4-FFF2-40B4-BE49-F238E27FC236}">
-                <a16:creationId xmlns:a16="http://schemas.microsoft.com/office/drawing/2014/main" id="{61B92B80-9722-44DA-9086-833E29D836C6}"/>
+                <a16:creationId xmlns:a16="http://schemas.microsoft.com/office/drawing/2014/main" id="{C87F91C2-D0B2-4367-A6CF-DEA852B87AA9}"/>
               </a:ext>
             </a:extLst>
           </p:cNvPr>
@@ -4674,7 +4674,7 @@
           <p:cNvPr id="8" name="">
             <a:extLst xmlns:a="http://schemas.openxmlformats.org/drawingml/2006/main">
               <a:ext uri="{FF2B5EF4-FFF2-40B4-BE49-F238E27FC236}">
-                <a16:creationId xmlns:a16="http://schemas.microsoft.com/office/drawing/2014/main" id="{6AFE9294-5B42-4FED-ABEC-1CFB24BDFD75}"/>
+                <a16:creationId xmlns:a16="http://schemas.microsoft.com/office/drawing/2014/main" id="{569B5920-4A5A-4EE2-AA88-E99A922206CF}"/>
               </a:ext>
             </a:extLst>
           </p:cNvPr>
@@ -4731,7 +4731,7 @@
           <p:cNvPr id="9" name="">
             <a:extLst xmlns:a="http://schemas.openxmlformats.org/drawingml/2006/main">
               <a:ext uri="{FF2B5EF4-FFF2-40B4-BE49-F238E27FC236}">
-                <a16:creationId xmlns:a16="http://schemas.microsoft.com/office/drawing/2014/main" id="{6B15D2DC-2CD1-4A04-AB57-DC73BFBA83E2}"/>
+                <a16:creationId xmlns:a16="http://schemas.microsoft.com/office/drawing/2014/main" id="{9C258D37-8959-4CE7-BED7-5702EA6F1F87}"/>
               </a:ext>
             </a:extLst>
           </p:cNvPr>
@@ -4788,7 +4788,7 @@
           <p:cNvPr id="10" name="">
             <a:extLst xmlns:a="http://schemas.openxmlformats.org/drawingml/2006/main">
               <a:ext uri="{FF2B5EF4-FFF2-40B4-BE49-F238E27FC236}">
-                <a16:creationId xmlns:a16="http://schemas.microsoft.com/office/drawing/2014/main" id="{7D7C70F0-7958-4A4B-A98D-BBCD38F1BE77}"/>
+                <a16:creationId xmlns:a16="http://schemas.microsoft.com/office/drawing/2014/main" id="{F2AA2B24-FD73-4579-BBDE-398C83221CB4}"/>
               </a:ext>
             </a:extLst>
           </p:cNvPr>
@@ -4822,7 +4822,7 @@
           <p:cNvPr id="11" name="">
             <a:extLst xmlns:a="http://schemas.openxmlformats.org/drawingml/2006/main">
               <a:ext uri="{FF2B5EF4-FFF2-40B4-BE49-F238E27FC236}">
-                <a16:creationId xmlns:a16="http://schemas.microsoft.com/office/drawing/2014/main" id="{7FFBCC71-088D-4533-9A06-A00E07164E01}"/>
+                <a16:creationId xmlns:a16="http://schemas.microsoft.com/office/drawing/2014/main" id="{8461579F-8CCC-476B-90DC-E0CF5CAC74FE}"/>
               </a:ext>
             </a:extLst>
           </p:cNvPr>
@@ -4854,7 +4854,7 @@
           <p:cNvPr id="12" name="">
             <a:extLst xmlns:a="http://schemas.openxmlformats.org/drawingml/2006/main">
               <a:ext uri="{FF2B5EF4-FFF2-40B4-BE49-F238E27FC236}">
-                <a16:creationId xmlns:a16="http://schemas.microsoft.com/office/drawing/2014/main" id="{EC556FD7-5C51-425A-86EC-D3EC6C41B9D2}"/>
+                <a16:creationId xmlns:a16="http://schemas.microsoft.com/office/drawing/2014/main" id="{B5E9AD77-E03E-4D8C-8AD1-8B2370005BC9}"/>
               </a:ext>
             </a:extLst>
           </p:cNvPr>
@@ -4911,7 +4911,7 @@
           <p:cNvPr id="13" name="">
             <a:extLst xmlns:a="http://schemas.openxmlformats.org/drawingml/2006/main">
               <a:ext uri="{FF2B5EF4-FFF2-40B4-BE49-F238E27FC236}">
-                <a16:creationId xmlns:a16="http://schemas.microsoft.com/office/drawing/2014/main" id="{C4D93202-0A06-49AA-B514-4A1B39359FAB}"/>
+                <a16:creationId xmlns:a16="http://schemas.microsoft.com/office/drawing/2014/main" id="{43EE862D-3E62-4562-99E5-C3D6A1A8FEE7}"/>
               </a:ext>
             </a:extLst>
           </p:cNvPr>
@@ -4968,7 +4968,7 @@
           <p:cNvPr id="14" name="">
             <a:extLst xmlns:a="http://schemas.openxmlformats.org/drawingml/2006/main">
               <a:ext uri="{FF2B5EF4-FFF2-40B4-BE49-F238E27FC236}">
-                <a16:creationId xmlns:a16="http://schemas.microsoft.com/office/drawing/2014/main" id="{25EEAFE5-B069-4D99-A50E-EDBD07F48F4D}"/>
+                <a16:creationId xmlns:a16="http://schemas.microsoft.com/office/drawing/2014/main" id="{2303E418-F192-4907-BA88-DBFC1E6D012E}"/>
               </a:ext>
             </a:extLst>
           </p:cNvPr>
@@ -5002,7 +5002,7 @@
           <p:cNvPr id="15" name="">
             <a:extLst xmlns:a="http://schemas.openxmlformats.org/drawingml/2006/main">
               <a:ext uri="{FF2B5EF4-FFF2-40B4-BE49-F238E27FC236}">
-                <a16:creationId xmlns:a16="http://schemas.microsoft.com/office/drawing/2014/main" id="{2A32D240-0E06-4F3B-B8DD-636CD985D512}"/>
+                <a16:creationId xmlns:a16="http://schemas.microsoft.com/office/drawing/2014/main" id="{4FBAD7FE-B7D4-473A-8D34-65B00EACEDBF}"/>
               </a:ext>
             </a:extLst>
           </p:cNvPr>
@@ -5034,7 +5034,7 @@
           <p:cNvPr id="16" name="">
             <a:extLst xmlns:a="http://schemas.openxmlformats.org/drawingml/2006/main">
               <a:ext uri="{FF2B5EF4-FFF2-40B4-BE49-F238E27FC236}">
-                <a16:creationId xmlns:a16="http://schemas.microsoft.com/office/drawing/2014/main" id="{DA7DC996-5FCA-4246-A96D-D729C30D63C7}"/>
+                <a16:creationId xmlns:a16="http://schemas.microsoft.com/office/drawing/2014/main" id="{1F6D4CBE-7C50-4D8F-BB80-DBA962134702}"/>
               </a:ext>
             </a:extLst>
           </p:cNvPr>
@@ -5091,7 +5091,7 @@
           <p:cNvPr id="17" name="">
             <a:extLst xmlns:a="http://schemas.openxmlformats.org/drawingml/2006/main">
               <a:ext uri="{FF2B5EF4-FFF2-40B4-BE49-F238E27FC236}">
-                <a16:creationId xmlns:a16="http://schemas.microsoft.com/office/drawing/2014/main" id="{8C8D272F-821B-4E03-BC01-66DB8E3E3ADA}"/>
+                <a16:creationId xmlns:a16="http://schemas.microsoft.com/office/drawing/2014/main" id="{E0E357C4-A9FB-40CB-BD4C-0A9EE545819B}"/>
               </a:ext>
             </a:extLst>
           </p:cNvPr>
@@ -5148,7 +5148,7 @@
           <p:cNvPr id="18" name="">
             <a:extLst xmlns:a="http://schemas.openxmlformats.org/drawingml/2006/main">
               <a:ext uri="{FF2B5EF4-FFF2-40B4-BE49-F238E27FC236}">
-                <a16:creationId xmlns:a16="http://schemas.microsoft.com/office/drawing/2014/main" id="{40F017A8-49B9-4B63-A184-81D8B142BAA2}"/>
+                <a16:creationId xmlns:a16="http://schemas.microsoft.com/office/drawing/2014/main" id="{250CAEB7-68CA-4869-B89C-D077B74D0040}"/>
               </a:ext>
             </a:extLst>
           </p:cNvPr>
@@ -5182,7 +5182,7 @@
           <p:cNvPr id="19" name="">
             <a:extLst xmlns:a="http://schemas.openxmlformats.org/drawingml/2006/main">
               <a:ext uri="{FF2B5EF4-FFF2-40B4-BE49-F238E27FC236}">
-                <a16:creationId xmlns:a16="http://schemas.microsoft.com/office/drawing/2014/main" id="{23F6FDF4-D409-4D16-BDF8-900A10EE780F}"/>
+                <a16:creationId xmlns:a16="http://schemas.microsoft.com/office/drawing/2014/main" id="{6FB7F4F2-1A32-431A-BFDE-B0546607120A}"/>
               </a:ext>
             </a:extLst>
           </p:cNvPr>
@@ -5214,7 +5214,7 @@
           <p:cNvPr id="20" name="">
             <a:extLst xmlns:a="http://schemas.openxmlformats.org/drawingml/2006/main">
               <a:ext uri="{FF2B5EF4-FFF2-40B4-BE49-F238E27FC236}">
-                <a16:creationId xmlns:a16="http://schemas.microsoft.com/office/drawing/2014/main" id="{6519F24C-F638-49AC-BDAE-6CE5AB2EE8CA}"/>
+                <a16:creationId xmlns:a16="http://schemas.microsoft.com/office/drawing/2014/main" id="{B1836A09-6A7D-4AF2-875A-805C3B157320}"/>
               </a:ext>
             </a:extLst>
           </p:cNvPr>
@@ -5271,7 +5271,7 @@
           <p:cNvPr id="21" name="">
             <a:extLst xmlns:a="http://schemas.openxmlformats.org/drawingml/2006/main">
               <a:ext uri="{FF2B5EF4-FFF2-40B4-BE49-F238E27FC236}">
-                <a16:creationId xmlns:a16="http://schemas.microsoft.com/office/drawing/2014/main" id="{E1469D15-2B4C-4B97-A645-6207172E991F}"/>
+                <a16:creationId xmlns:a16="http://schemas.microsoft.com/office/drawing/2014/main" id="{24734287-7F73-45B2-999D-52ABA9A04BA4}"/>
               </a:ext>
             </a:extLst>
           </p:cNvPr>
@@ -5328,7 +5328,7 @@
           <p:cNvPr id="22" name="">
             <a:extLst xmlns:a="http://schemas.openxmlformats.org/drawingml/2006/main">
               <a:ext uri="{FF2B5EF4-FFF2-40B4-BE49-F238E27FC236}">
-                <a16:creationId xmlns:a16="http://schemas.microsoft.com/office/drawing/2014/main" id="{B1E9F7BF-688E-4BFF-B65A-7DC261938A59}"/>
+                <a16:creationId xmlns:a16="http://schemas.microsoft.com/office/drawing/2014/main" id="{8586E5D6-51C4-45A0-923B-016424ADD909}"/>
               </a:ext>
             </a:extLst>
           </p:cNvPr>
@@ -5383,7 +5383,7 @@
     </p:spTree>
     <p:extLst>
       <p:ext uri="{BB962C8B-B14F-4D97-AF65-F5344CB8AC3E}">
-        <p14:creationId xmlns:p14="http://schemas.microsoft.com/office/powerpoint/2010/main" val="235975316"/>
+        <p14:creationId xmlns:p14="http://schemas.microsoft.com/office/powerpoint/2010/main" val="1891362862"/>
       </p:ext>
     </p:extLst>
   </p:cSld>
@@ -5584,7 +5584,7 @@
           <p:cNvPr id="23" name="">
             <a:extLst xmlns:a="http://schemas.openxmlformats.org/drawingml/2006/main">
               <a:ext uri="{FF2B5EF4-FFF2-40B4-BE49-F238E27FC236}">
-                <a16:creationId xmlns:a16="http://schemas.microsoft.com/office/drawing/2014/main" id="{20CB745C-9F75-4280-BBAE-0C1A54EC8184}"/>
+                <a16:creationId xmlns:a16="http://schemas.microsoft.com/office/drawing/2014/main" id="{21617070-3918-49E3-9BFA-1CD5E7FDF6B0}"/>
               </a:ext>
             </a:extLst>
           </p:cNvPr>
@@ -5616,7 +5616,7 @@
           <p:cNvPr id="2" name="">
             <a:extLst xmlns:a="http://schemas.openxmlformats.org/drawingml/2006/main">
               <a:ext uri="{FF2B5EF4-FFF2-40B4-BE49-F238E27FC236}">
-                <a16:creationId xmlns:a16="http://schemas.microsoft.com/office/drawing/2014/main" id="{45B15AA3-9E31-432A-B897-FC83B864594E}"/>
+                <a16:creationId xmlns:a16="http://schemas.microsoft.com/office/drawing/2014/main" id="{9601738F-E3F5-4FBA-9D89-F7F6D60699BF}"/>
               </a:ext>
             </a:extLst>
           </p:cNvPr>
@@ -5673,7 +5673,7 @@
           <p:cNvPr id="3" name="">
             <a:extLst xmlns:a="http://schemas.openxmlformats.org/drawingml/2006/main">
               <a:ext uri="{FF2B5EF4-FFF2-40B4-BE49-F238E27FC236}">
-                <a16:creationId xmlns:a16="http://schemas.microsoft.com/office/drawing/2014/main" id="{EBF69757-6F6D-495F-889C-9F2F5D708762}"/>
+                <a16:creationId xmlns:a16="http://schemas.microsoft.com/office/drawing/2014/main" id="{4501EC15-67EE-47A1-B4D1-DF6979744CB6}"/>
               </a:ext>
             </a:extLst>
           </p:cNvPr>
@@ -5705,7 +5705,7 @@
           <p:cNvPr id="4" name="">
             <a:extLst xmlns:a="http://schemas.openxmlformats.org/drawingml/2006/main">
               <a:ext uri="{FF2B5EF4-FFF2-40B4-BE49-F238E27FC236}">
-                <a16:creationId xmlns:a16="http://schemas.microsoft.com/office/drawing/2014/main" id="{685DC25E-3757-44D7-BABD-E3E714101210}"/>
+                <a16:creationId xmlns:a16="http://schemas.microsoft.com/office/drawing/2014/main" id="{B7CDF5D3-5ACA-4B89-92B1-ED88A49E8E30}"/>
               </a:ext>
             </a:extLst>
           </p:cNvPr>
@@ -5762,7 +5762,7 @@
           <p:cNvPr id="5" name="">
             <a:extLst xmlns:a="http://schemas.openxmlformats.org/drawingml/2006/main">
               <a:ext uri="{FF2B5EF4-FFF2-40B4-BE49-F238E27FC236}">
-                <a16:creationId xmlns:a16="http://schemas.microsoft.com/office/drawing/2014/main" id="{9B71C0BF-CEBD-4430-9629-EE79057A9E4A}"/>
+                <a16:creationId xmlns:a16="http://schemas.microsoft.com/office/drawing/2014/main" id="{33CA8DCC-F0E5-4B22-B326-EE2E7F632BFF}"/>
               </a:ext>
             </a:extLst>
           </p:cNvPr>
@@ -5819,7 +5819,7 @@
           <p:cNvPr id="6" name="">
             <a:extLst xmlns:a="http://schemas.openxmlformats.org/drawingml/2006/main">
               <a:ext uri="{FF2B5EF4-FFF2-40B4-BE49-F238E27FC236}">
-                <a16:creationId xmlns:a16="http://schemas.microsoft.com/office/drawing/2014/main" id="{CB937A91-AD3B-4E9F-ABB1-734526E3E791}"/>
+                <a16:creationId xmlns:a16="http://schemas.microsoft.com/office/drawing/2014/main" id="{0D3F8238-C071-455F-84AE-0ABB875AE454}"/>
               </a:ext>
             </a:extLst>
           </p:cNvPr>
@@ -5876,7 +5876,7 @@
           <p:cNvPr id="7" name="">
             <a:extLst xmlns:a="http://schemas.openxmlformats.org/drawingml/2006/main">
               <a:ext uri="{FF2B5EF4-FFF2-40B4-BE49-F238E27FC236}">
-                <a16:creationId xmlns:a16="http://schemas.microsoft.com/office/drawing/2014/main" id="{1E069431-8430-46BA-B50C-32D70436615E}"/>
+                <a16:creationId xmlns:a16="http://schemas.microsoft.com/office/drawing/2014/main" id="{5BEF0DAA-9BA7-49AD-B4CC-0BB20F502E97}"/>
               </a:ext>
             </a:extLst>
           </p:cNvPr>
@@ -5908,7 +5908,7 @@
           <p:cNvPr id="8" name="">
             <a:extLst xmlns:a="http://schemas.openxmlformats.org/drawingml/2006/main">
               <a:ext uri="{FF2B5EF4-FFF2-40B4-BE49-F238E27FC236}">
-                <a16:creationId xmlns:a16="http://schemas.microsoft.com/office/drawing/2014/main" id="{D4AC0AF4-5411-4FE7-A84D-338754E70420}"/>
+                <a16:creationId xmlns:a16="http://schemas.microsoft.com/office/drawing/2014/main" id="{0106688C-A056-41A3-B876-2F36910A9F77}"/>
               </a:ext>
             </a:extLst>
           </p:cNvPr>
@@ -5965,7 +5965,7 @@
           <p:cNvPr id="9" name="">
             <a:extLst xmlns:a="http://schemas.openxmlformats.org/drawingml/2006/main">
               <a:ext uri="{FF2B5EF4-FFF2-40B4-BE49-F238E27FC236}">
-                <a16:creationId xmlns:a16="http://schemas.microsoft.com/office/drawing/2014/main" id="{DC13CDBF-923A-4EDF-97A9-B5C31617AC8F}"/>
+                <a16:creationId xmlns:a16="http://schemas.microsoft.com/office/drawing/2014/main" id="{8E9DCB6E-87BD-4415-B970-984B2C37131A}"/>
               </a:ext>
             </a:extLst>
           </p:cNvPr>
@@ -6022,7 +6022,7 @@
           <p:cNvPr id="10" name="">
             <a:extLst xmlns:a="http://schemas.openxmlformats.org/drawingml/2006/main">
               <a:ext uri="{FF2B5EF4-FFF2-40B4-BE49-F238E27FC236}">
-                <a16:creationId xmlns:a16="http://schemas.microsoft.com/office/drawing/2014/main" id="{CA809510-466E-4A0E-B401-8BF6224E97B7}"/>
+                <a16:creationId xmlns:a16="http://schemas.microsoft.com/office/drawing/2014/main" id="{FD84D0D2-5353-44F8-8122-91820497845A}"/>
               </a:ext>
             </a:extLst>
           </p:cNvPr>
@@ -6056,7 +6056,7 @@
           <p:cNvPr id="11" name="">
             <a:extLst xmlns:a="http://schemas.openxmlformats.org/drawingml/2006/main">
               <a:ext uri="{FF2B5EF4-FFF2-40B4-BE49-F238E27FC236}">
-                <a16:creationId xmlns:a16="http://schemas.microsoft.com/office/drawing/2014/main" id="{FC358F33-DFCE-4B13-9EA6-F71184B308E4}"/>
+                <a16:creationId xmlns:a16="http://schemas.microsoft.com/office/drawing/2014/main" id="{D4A994E9-90C8-41B6-B09E-3E120052F4DA}"/>
               </a:ext>
             </a:extLst>
           </p:cNvPr>
@@ -6088,7 +6088,7 @@
           <p:cNvPr id="12" name="">
             <a:extLst xmlns:a="http://schemas.openxmlformats.org/drawingml/2006/main">
               <a:ext uri="{FF2B5EF4-FFF2-40B4-BE49-F238E27FC236}">
-                <a16:creationId xmlns:a16="http://schemas.microsoft.com/office/drawing/2014/main" id="{A4D5B4E5-C9B2-4233-80FE-21274AF0C0A3}"/>
+                <a16:creationId xmlns:a16="http://schemas.microsoft.com/office/drawing/2014/main" id="{2FC1C91A-89B1-4E2C-9889-7065060D4ACF}"/>
               </a:ext>
             </a:extLst>
           </p:cNvPr>
@@ -6145,7 +6145,7 @@
           <p:cNvPr id="13" name="">
             <a:extLst xmlns:a="http://schemas.openxmlformats.org/drawingml/2006/main">
               <a:ext uri="{FF2B5EF4-FFF2-40B4-BE49-F238E27FC236}">
-                <a16:creationId xmlns:a16="http://schemas.microsoft.com/office/drawing/2014/main" id="{43EF462C-E4FA-4B0B-B7CF-AFDECEB55CC5}"/>
+                <a16:creationId xmlns:a16="http://schemas.microsoft.com/office/drawing/2014/main" id="{7EA37973-E377-49C9-982F-B148D156047B}"/>
               </a:ext>
             </a:extLst>
           </p:cNvPr>
@@ -6202,7 +6202,7 @@
           <p:cNvPr id="14" name="">
             <a:extLst xmlns:a="http://schemas.openxmlformats.org/drawingml/2006/main">
               <a:ext uri="{FF2B5EF4-FFF2-40B4-BE49-F238E27FC236}">
-                <a16:creationId xmlns:a16="http://schemas.microsoft.com/office/drawing/2014/main" id="{F73544CB-DAE2-4BCE-8D73-7AE6EC495ACD}"/>
+                <a16:creationId xmlns:a16="http://schemas.microsoft.com/office/drawing/2014/main" id="{C051B4EE-9FD7-4F78-8DAB-D8134376EEF8}"/>
               </a:ext>
             </a:extLst>
           </p:cNvPr>
@@ -6236,7 +6236,7 @@
           <p:cNvPr id="15" name="">
             <a:extLst xmlns:a="http://schemas.openxmlformats.org/drawingml/2006/main">
               <a:ext uri="{FF2B5EF4-FFF2-40B4-BE49-F238E27FC236}">
-                <a16:creationId xmlns:a16="http://schemas.microsoft.com/office/drawing/2014/main" id="{FD1D605F-4B77-4DE2-81BA-FAB117529E50}"/>
+                <a16:creationId xmlns:a16="http://schemas.microsoft.com/office/drawing/2014/main" id="{D2D2E738-74C4-4147-BBB7-FAE914F9999E}"/>
               </a:ext>
             </a:extLst>
           </p:cNvPr>
@@ -6268,7 +6268,7 @@
           <p:cNvPr id="16" name="">
             <a:extLst xmlns:a="http://schemas.openxmlformats.org/drawingml/2006/main">
               <a:ext uri="{FF2B5EF4-FFF2-40B4-BE49-F238E27FC236}">
-                <a16:creationId xmlns:a16="http://schemas.microsoft.com/office/drawing/2014/main" id="{0E0F4113-AC28-4A39-A917-876A1CD914ED}"/>
+                <a16:creationId xmlns:a16="http://schemas.microsoft.com/office/drawing/2014/main" id="{201831B0-B5E4-497C-BDFE-3BECCFE49412}"/>
               </a:ext>
             </a:extLst>
           </p:cNvPr>
@@ -6325,7 +6325,7 @@
           <p:cNvPr id="17" name="">
             <a:extLst xmlns:a="http://schemas.openxmlformats.org/drawingml/2006/main">
               <a:ext uri="{FF2B5EF4-FFF2-40B4-BE49-F238E27FC236}">
-                <a16:creationId xmlns:a16="http://schemas.microsoft.com/office/drawing/2014/main" id="{BEDE921C-8F50-457C-9CC6-0708B372EFCE}"/>
+                <a16:creationId xmlns:a16="http://schemas.microsoft.com/office/drawing/2014/main" id="{ADA63B5E-FA05-459B-868C-21B694F051C1}"/>
               </a:ext>
             </a:extLst>
           </p:cNvPr>
@@ -6382,7 +6382,7 @@
           <p:cNvPr id="18" name="">
             <a:extLst xmlns:a="http://schemas.openxmlformats.org/drawingml/2006/main">
               <a:ext uri="{FF2B5EF4-FFF2-40B4-BE49-F238E27FC236}">
-                <a16:creationId xmlns:a16="http://schemas.microsoft.com/office/drawing/2014/main" id="{AF5CAA8C-79E1-4653-BF35-38447D56F5F1}"/>
+                <a16:creationId xmlns:a16="http://schemas.microsoft.com/office/drawing/2014/main" id="{CCFFF371-E79D-4A22-9033-67CFA56A6C98}"/>
               </a:ext>
             </a:extLst>
           </p:cNvPr>
@@ -6416,7 +6416,7 @@
           <p:cNvPr id="19" name="">
             <a:extLst xmlns:a="http://schemas.openxmlformats.org/drawingml/2006/main">
               <a:ext uri="{FF2B5EF4-FFF2-40B4-BE49-F238E27FC236}">
-                <a16:creationId xmlns:a16="http://schemas.microsoft.com/office/drawing/2014/main" id="{7E479CB2-6775-47C1-AD9F-EFA9A9F4C82B}"/>
+                <a16:creationId xmlns:a16="http://schemas.microsoft.com/office/drawing/2014/main" id="{697FDBE7-869A-458A-BECD-5F8FEBF4FCC7}"/>
               </a:ext>
             </a:extLst>
           </p:cNvPr>
@@ -6448,7 +6448,7 @@
           <p:cNvPr id="20" name="">
             <a:extLst xmlns:a="http://schemas.openxmlformats.org/drawingml/2006/main">
               <a:ext uri="{FF2B5EF4-FFF2-40B4-BE49-F238E27FC236}">
-                <a16:creationId xmlns:a16="http://schemas.microsoft.com/office/drawing/2014/main" id="{6E9F3480-026B-441E-85A5-2B1F1DDCF325}"/>
+                <a16:creationId xmlns:a16="http://schemas.microsoft.com/office/drawing/2014/main" id="{1130CAB5-16F8-4052-9A53-0D0F48B97F89}"/>
               </a:ext>
             </a:extLst>
           </p:cNvPr>
@@ -6505,7 +6505,7 @@
           <p:cNvPr id="21" name="">
             <a:extLst xmlns:a="http://schemas.openxmlformats.org/drawingml/2006/main">
               <a:ext uri="{FF2B5EF4-FFF2-40B4-BE49-F238E27FC236}">
-                <a16:creationId xmlns:a16="http://schemas.microsoft.com/office/drawing/2014/main" id="{C077B1C7-96DE-43F0-88DE-FE86406DA381}"/>
+                <a16:creationId xmlns:a16="http://schemas.microsoft.com/office/drawing/2014/main" id="{D49B7241-E8CC-41B7-AE6B-958ACD8931B9}"/>
               </a:ext>
             </a:extLst>
           </p:cNvPr>
@@ -6562,7 +6562,7 @@
           <p:cNvPr id="22" name="">
             <a:extLst xmlns:a="http://schemas.openxmlformats.org/drawingml/2006/main">
               <a:ext uri="{FF2B5EF4-FFF2-40B4-BE49-F238E27FC236}">
-                <a16:creationId xmlns:a16="http://schemas.microsoft.com/office/drawing/2014/main" id="{ACFF70EA-62BE-4797-BADD-763AF050C233}"/>
+                <a16:creationId xmlns:a16="http://schemas.microsoft.com/office/drawing/2014/main" id="{4BA28320-1049-41D8-A353-6A60DC0BBA60}"/>
               </a:ext>
             </a:extLst>
           </p:cNvPr>
@@ -6617,7 +6617,7 @@
     </p:spTree>
     <p:extLst>
       <p:ext uri="{BB962C8B-B14F-4D97-AF65-F5344CB8AC3E}">
-        <p14:creationId xmlns:p14="http://schemas.microsoft.com/office/powerpoint/2010/main" val="878917282"/>
+        <p14:creationId xmlns:p14="http://schemas.microsoft.com/office/powerpoint/2010/main" val="1402917180"/>
       </p:ext>
     </p:extLst>
   </p:cSld>
@@ -6818,7 +6818,7 @@
           <p:cNvPr id="16" name="">
             <a:extLst xmlns:a="http://schemas.openxmlformats.org/drawingml/2006/main">
               <a:ext uri="{FF2B5EF4-FFF2-40B4-BE49-F238E27FC236}">
-                <a16:creationId xmlns:a16="http://schemas.microsoft.com/office/drawing/2014/main" id="{7196D0CA-1405-4FAA-B62C-CC28D96540B3}"/>
+                <a16:creationId xmlns:a16="http://schemas.microsoft.com/office/drawing/2014/main" id="{01510ECE-1E8E-4C8B-A17B-2A4225FC8F2B}"/>
               </a:ext>
             </a:extLst>
           </p:cNvPr>
@@ -6850,7 +6850,7 @@
           <p:cNvPr id="2" name="">
             <a:extLst xmlns:a="http://schemas.openxmlformats.org/drawingml/2006/main">
               <a:ext uri="{FF2B5EF4-FFF2-40B4-BE49-F238E27FC236}">
-                <a16:creationId xmlns:a16="http://schemas.microsoft.com/office/drawing/2014/main" id="{8EB315AE-9ABD-4019-A553-1F12006EEEDA}"/>
+                <a16:creationId xmlns:a16="http://schemas.microsoft.com/office/drawing/2014/main" id="{D7BFF705-6E63-4303-8ED0-70462ADED677}"/>
               </a:ext>
             </a:extLst>
           </p:cNvPr>
@@ -6907,7 +6907,7 @@
           <p:cNvPr id="3" name="">
             <a:extLst xmlns:a="http://schemas.openxmlformats.org/drawingml/2006/main">
               <a:ext uri="{FF2B5EF4-FFF2-40B4-BE49-F238E27FC236}">
-                <a16:creationId xmlns:a16="http://schemas.microsoft.com/office/drawing/2014/main" id="{9DEADB4B-C447-48BE-9B70-0D88C44BA66B}"/>
+                <a16:creationId xmlns:a16="http://schemas.microsoft.com/office/drawing/2014/main" id="{814F5EC6-C228-4DA9-8A50-351DCEE00221}"/>
               </a:ext>
             </a:extLst>
           </p:cNvPr>
@@ -6939,7 +6939,7 @@
           <p:cNvPr id="4" name="">
             <a:extLst xmlns:a="http://schemas.openxmlformats.org/drawingml/2006/main">
               <a:ext uri="{FF2B5EF4-FFF2-40B4-BE49-F238E27FC236}">
-                <a16:creationId xmlns:a16="http://schemas.microsoft.com/office/drawing/2014/main" id="{1D5098F4-187B-4CA0-BF9A-4F76243C27A5}"/>
+                <a16:creationId xmlns:a16="http://schemas.microsoft.com/office/drawing/2014/main" id="{00440481-1DF6-4B5A-A415-CA347C77D4D0}"/>
               </a:ext>
             </a:extLst>
           </p:cNvPr>
@@ -6996,7 +6996,7 @@
           <p:cNvPr id="5" name="">
             <a:extLst xmlns:a="http://schemas.openxmlformats.org/drawingml/2006/main">
               <a:ext uri="{FF2B5EF4-FFF2-40B4-BE49-F238E27FC236}">
-                <a16:creationId xmlns:a16="http://schemas.microsoft.com/office/drawing/2014/main" id="{73A20D0F-BFE4-4A0C-A73F-106A8B0D487B}"/>
+                <a16:creationId xmlns:a16="http://schemas.microsoft.com/office/drawing/2014/main" id="{453EDC08-15BF-41F9-A686-013FA5507CF2}"/>
               </a:ext>
             </a:extLst>
           </p:cNvPr>
@@ -7053,7 +7053,7 @@
           <p:cNvPr id="6" name="">
             <a:extLst xmlns:a="http://schemas.openxmlformats.org/drawingml/2006/main">
               <a:ext uri="{FF2B5EF4-FFF2-40B4-BE49-F238E27FC236}">
-                <a16:creationId xmlns:a16="http://schemas.microsoft.com/office/drawing/2014/main" id="{EFFCD9BA-BBA3-4B66-AC68-72526E1867F9}"/>
+                <a16:creationId xmlns:a16="http://schemas.microsoft.com/office/drawing/2014/main" id="{BBFFEF3B-37BC-488E-9553-6C26505177DF}"/>
               </a:ext>
             </a:extLst>
           </p:cNvPr>
@@ -7110,7 +7110,7 @@
           <p:cNvPr id="7" name="">
             <a:extLst xmlns:a="http://schemas.openxmlformats.org/drawingml/2006/main">
               <a:ext uri="{FF2B5EF4-FFF2-40B4-BE49-F238E27FC236}">
-                <a16:creationId xmlns:a16="http://schemas.microsoft.com/office/drawing/2014/main" id="{7A46422F-B29C-4119-85D9-4A163C018A13}"/>
+                <a16:creationId xmlns:a16="http://schemas.microsoft.com/office/drawing/2014/main" id="{6D9917B1-F47A-4B75-93A3-F0F5998885C9}"/>
               </a:ext>
             </a:extLst>
           </p:cNvPr>
@@ -7142,7 +7142,7 @@
           <p:cNvPr id="8" name="">
             <a:extLst xmlns:a="http://schemas.openxmlformats.org/drawingml/2006/main">
               <a:ext uri="{FF2B5EF4-FFF2-40B4-BE49-F238E27FC236}">
-                <a16:creationId xmlns:a16="http://schemas.microsoft.com/office/drawing/2014/main" id="{D1214FD7-3BAD-4036-AA44-20F03D1B617B}"/>
+                <a16:creationId xmlns:a16="http://schemas.microsoft.com/office/drawing/2014/main" id="{7F279764-4651-4FBC-89D2-91D11BA23EA2}"/>
               </a:ext>
             </a:extLst>
           </p:cNvPr>
@@ -7199,7 +7199,7 @@
           <p:cNvPr id="9" name="">
             <a:extLst xmlns:a="http://schemas.openxmlformats.org/drawingml/2006/main">
               <a:ext uri="{FF2B5EF4-FFF2-40B4-BE49-F238E27FC236}">
-                <a16:creationId xmlns:a16="http://schemas.microsoft.com/office/drawing/2014/main" id="{61B05D9A-C824-4BCA-BC64-E6D74ECAC5F0}"/>
+                <a16:creationId xmlns:a16="http://schemas.microsoft.com/office/drawing/2014/main" id="{38E6A157-C35A-4302-A372-8FB6982377F3}"/>
               </a:ext>
             </a:extLst>
           </p:cNvPr>
@@ -7256,7 +7256,7 @@
           <p:cNvPr id="10" name="">
             <a:extLst xmlns:a="http://schemas.openxmlformats.org/drawingml/2006/main">
               <a:ext uri="{FF2B5EF4-FFF2-40B4-BE49-F238E27FC236}">
-                <a16:creationId xmlns:a16="http://schemas.microsoft.com/office/drawing/2014/main" id="{66AFD0FB-BD0F-4795-897D-CA5C5478B5D7}"/>
+                <a16:creationId xmlns:a16="http://schemas.microsoft.com/office/drawing/2014/main" id="{DCB45EFE-8EE0-4B92-8B08-266F8598F4B4}"/>
               </a:ext>
             </a:extLst>
           </p:cNvPr>
@@ -7313,7 +7313,7 @@
           <p:cNvPr id="11" name="">
             <a:extLst xmlns:a="http://schemas.openxmlformats.org/drawingml/2006/main">
               <a:ext uri="{FF2B5EF4-FFF2-40B4-BE49-F238E27FC236}">
-                <a16:creationId xmlns:a16="http://schemas.microsoft.com/office/drawing/2014/main" id="{228EE381-2085-4357-B53E-74E8115D6EA5}"/>
+                <a16:creationId xmlns:a16="http://schemas.microsoft.com/office/drawing/2014/main" id="{623ABAA7-8C29-45BB-A0E0-40A9532B7A89}"/>
               </a:ext>
             </a:extLst>
           </p:cNvPr>
@@ -7345,7 +7345,7 @@
           <p:cNvPr id="12" name="">
             <a:extLst xmlns:a="http://schemas.openxmlformats.org/drawingml/2006/main">
               <a:ext uri="{FF2B5EF4-FFF2-40B4-BE49-F238E27FC236}">
-                <a16:creationId xmlns:a16="http://schemas.microsoft.com/office/drawing/2014/main" id="{B402E00E-554C-4D7C-B8F1-7F2C35F90B40}"/>
+                <a16:creationId xmlns:a16="http://schemas.microsoft.com/office/drawing/2014/main" id="{8E9F988E-D416-4E35-94B0-ECB415A54D84}"/>
               </a:ext>
             </a:extLst>
           </p:cNvPr>
@@ -7402,7 +7402,7 @@
           <p:cNvPr id="13" name="">
             <a:extLst xmlns:a="http://schemas.openxmlformats.org/drawingml/2006/main">
               <a:ext uri="{FF2B5EF4-FFF2-40B4-BE49-F238E27FC236}">
-                <a16:creationId xmlns:a16="http://schemas.microsoft.com/office/drawing/2014/main" id="{26C8DBC7-3069-46BF-9513-79A41EF07EC9}"/>
+                <a16:creationId xmlns:a16="http://schemas.microsoft.com/office/drawing/2014/main" id="{8BFDB96C-7509-48DA-822E-02F59C066300}"/>
               </a:ext>
             </a:extLst>
           </p:cNvPr>
@@ -7459,7 +7459,7 @@
           <p:cNvPr id="14" name="">
             <a:extLst xmlns:a="http://schemas.openxmlformats.org/drawingml/2006/main">
               <a:ext uri="{FF2B5EF4-FFF2-40B4-BE49-F238E27FC236}">
-                <a16:creationId xmlns:a16="http://schemas.microsoft.com/office/drawing/2014/main" id="{BFF185FE-D8EF-4F30-B18F-C294FB19C559}"/>
+                <a16:creationId xmlns:a16="http://schemas.microsoft.com/office/drawing/2014/main" id="{55C813C7-1333-40BA-B195-49E3CF3828AB}"/>
               </a:ext>
             </a:extLst>
           </p:cNvPr>
@@ -7516,7 +7516,7 @@
           <p:cNvPr id="15" name="">
             <a:extLst xmlns:a="http://schemas.openxmlformats.org/drawingml/2006/main">
               <a:ext uri="{FF2B5EF4-FFF2-40B4-BE49-F238E27FC236}">
-                <a16:creationId xmlns:a16="http://schemas.microsoft.com/office/drawing/2014/main" id="{93DA9411-BBFB-4A53-8B8B-4DF4ACD961A7}"/>
+                <a16:creationId xmlns:a16="http://schemas.microsoft.com/office/drawing/2014/main" id="{79CDA664-B461-4820-97A1-8C94AD4B5E9E}"/>
               </a:ext>
             </a:extLst>
           </p:cNvPr>
@@ -7571,7 +7571,7 @@
     </p:spTree>
     <p:extLst>
       <p:ext uri="{BB962C8B-B14F-4D97-AF65-F5344CB8AC3E}">
-        <p14:creationId xmlns:p14="http://schemas.microsoft.com/office/powerpoint/2010/main" val="1023248438"/>
+        <p14:creationId xmlns:p14="http://schemas.microsoft.com/office/powerpoint/2010/main" val="1713489253"/>
       </p:ext>
     </p:extLst>
   </p:cSld>
@@ -7772,7 +7772,7 @@
           <p:cNvPr id="23" name="">
             <a:extLst xmlns:a="http://schemas.openxmlformats.org/drawingml/2006/main">
               <a:ext uri="{FF2B5EF4-FFF2-40B4-BE49-F238E27FC236}">
-                <a16:creationId xmlns:a16="http://schemas.microsoft.com/office/drawing/2014/main" id="{0792DCB2-08B6-4CFA-A020-0781B6F53C9A}"/>
+                <a16:creationId xmlns:a16="http://schemas.microsoft.com/office/drawing/2014/main" id="{078050EA-6891-40B6-9C1E-C662F7962481}"/>
               </a:ext>
             </a:extLst>
           </p:cNvPr>
@@ -7804,7 +7804,7 @@
           <p:cNvPr id="2" name="">
             <a:extLst xmlns:a="http://schemas.openxmlformats.org/drawingml/2006/main">
               <a:ext uri="{FF2B5EF4-FFF2-40B4-BE49-F238E27FC236}">
-                <a16:creationId xmlns:a16="http://schemas.microsoft.com/office/drawing/2014/main" id="{62749DDE-613B-44C4-87CC-F3F7239255E5}"/>
+                <a16:creationId xmlns:a16="http://schemas.microsoft.com/office/drawing/2014/main" id="{6AE80B5C-6BF6-46C7-B0C6-638799C3A6FD}"/>
               </a:ext>
             </a:extLst>
           </p:cNvPr>
@@ -7861,7 +7861,7 @@
           <p:cNvPr id="3" name="">
             <a:extLst xmlns:a="http://schemas.openxmlformats.org/drawingml/2006/main">
               <a:ext uri="{FF2B5EF4-FFF2-40B4-BE49-F238E27FC236}">
-                <a16:creationId xmlns:a16="http://schemas.microsoft.com/office/drawing/2014/main" id="{A4BF3842-588B-4E02-BED2-0F792F5CB9B0}"/>
+                <a16:creationId xmlns:a16="http://schemas.microsoft.com/office/drawing/2014/main" id="{2ADD6A9D-2E3F-4FDC-9BA6-E0CE03165CBF}"/>
               </a:ext>
             </a:extLst>
           </p:cNvPr>
@@ -7893,7 +7893,7 @@
           <p:cNvPr id="4" name="">
             <a:extLst xmlns:a="http://schemas.openxmlformats.org/drawingml/2006/main">
               <a:ext uri="{FF2B5EF4-FFF2-40B4-BE49-F238E27FC236}">
-                <a16:creationId xmlns:a16="http://schemas.microsoft.com/office/drawing/2014/main" id="{93B00747-3427-49E4-A21C-AEBEC0582196}"/>
+                <a16:creationId xmlns:a16="http://schemas.microsoft.com/office/drawing/2014/main" id="{A0649C22-7331-4391-9904-24B22BDE4A53}"/>
               </a:ext>
             </a:extLst>
           </p:cNvPr>
@@ -7950,7 +7950,7 @@
           <p:cNvPr id="5" name="">
             <a:extLst xmlns:a="http://schemas.openxmlformats.org/drawingml/2006/main">
               <a:ext uri="{FF2B5EF4-FFF2-40B4-BE49-F238E27FC236}">
-                <a16:creationId xmlns:a16="http://schemas.microsoft.com/office/drawing/2014/main" id="{D52CE346-89FB-431A-B3FF-369EC0253D1A}"/>
+                <a16:creationId xmlns:a16="http://schemas.microsoft.com/office/drawing/2014/main" id="{2769315F-FA58-4D70-9157-7EA82F4712B2}"/>
               </a:ext>
             </a:extLst>
           </p:cNvPr>
@@ -8007,7 +8007,7 @@
           <p:cNvPr id="6" name="">
             <a:extLst xmlns:a="http://schemas.openxmlformats.org/drawingml/2006/main">
               <a:ext uri="{FF2B5EF4-FFF2-40B4-BE49-F238E27FC236}">
-                <a16:creationId xmlns:a16="http://schemas.microsoft.com/office/drawing/2014/main" id="{5295DF72-5A80-444F-B6B9-AFD705B4EEEC}"/>
+                <a16:creationId xmlns:a16="http://schemas.microsoft.com/office/drawing/2014/main" id="{A0001283-7AA5-4554-9D2C-EEBEC451BFF9}"/>
               </a:ext>
             </a:extLst>
           </p:cNvPr>
@@ -8064,7 +8064,7 @@
           <p:cNvPr id="7" name="">
             <a:extLst xmlns:a="http://schemas.openxmlformats.org/drawingml/2006/main">
               <a:ext uri="{FF2B5EF4-FFF2-40B4-BE49-F238E27FC236}">
-                <a16:creationId xmlns:a16="http://schemas.microsoft.com/office/drawing/2014/main" id="{59EBB438-E46B-4F5B-99EA-229FAD5982DE}"/>
+                <a16:creationId xmlns:a16="http://schemas.microsoft.com/office/drawing/2014/main" id="{5C27A10F-7584-4527-BAEB-B38145D04E79}"/>
               </a:ext>
             </a:extLst>
           </p:cNvPr>
@@ -8096,7 +8096,7 @@
           <p:cNvPr id="8" name="">
             <a:extLst xmlns:a="http://schemas.openxmlformats.org/drawingml/2006/main">
               <a:ext uri="{FF2B5EF4-FFF2-40B4-BE49-F238E27FC236}">
-                <a16:creationId xmlns:a16="http://schemas.microsoft.com/office/drawing/2014/main" id="{F2D9F62A-FB5A-45E3-A1C4-F99E05507FE6}"/>
+                <a16:creationId xmlns:a16="http://schemas.microsoft.com/office/drawing/2014/main" id="{8F44A35A-D0EC-4740-A5A6-A437FEB43C11}"/>
               </a:ext>
             </a:extLst>
           </p:cNvPr>
@@ -8153,7 +8153,7 @@
           <p:cNvPr id="9" name="">
             <a:extLst xmlns:a="http://schemas.openxmlformats.org/drawingml/2006/main">
               <a:ext uri="{FF2B5EF4-FFF2-40B4-BE49-F238E27FC236}">
-                <a16:creationId xmlns:a16="http://schemas.microsoft.com/office/drawing/2014/main" id="{0FC63740-197B-4A6B-8C8F-CA39DD6CA21C}"/>
+                <a16:creationId xmlns:a16="http://schemas.microsoft.com/office/drawing/2014/main" id="{FE4F4C74-A858-4CD3-BB53-97AC61292E8B}"/>
               </a:ext>
             </a:extLst>
           </p:cNvPr>
@@ -8210,19 +8210,19 @@
           <p:cNvPr id="10" name="">
             <a:extLst xmlns:a="http://schemas.openxmlformats.org/drawingml/2006/main">
               <a:ext uri="{FF2B5EF4-FFF2-40B4-BE49-F238E27FC236}">
-                <a16:creationId xmlns:a16="http://schemas.microsoft.com/office/drawing/2014/main" id="{42383857-26A0-4C63-B0EF-2F0CC495D43A}"/>
-              </a:ext>
-            </a:extLst>
-          </p:cNvPr>
-          <p:cNvSpPr>
-            <a:spLocks xmlns:a="http://schemas.openxmlformats.org/drawingml/2006/main" noGrp="1"/>
-          </p:cNvSpPr>
-          <p:nvPr/>
-        </p:nvSpPr>
-        <p:spPr>
-          <a:xfrm xmlns:a="http://schemas.openxmlformats.org/drawingml/2006/main">
-            <a:off x="914400" y="1257300"/>
-            <a:ext cx="10363200" cy="781050"/>
+                <a16:creationId xmlns:a16="http://schemas.microsoft.com/office/drawing/2014/main" id="{84D327A8-B8C4-4ED7-996B-FF2AB20680AF}"/>
+              </a:ext>
+            </a:extLst>
+          </p:cNvPr>
+          <p:cNvSpPr>
+            <a:spLocks xmlns:a="http://schemas.openxmlformats.org/drawingml/2006/main" noGrp="1"/>
+          </p:cNvSpPr>
+          <p:nvPr/>
+        </p:nvSpPr>
+        <p:spPr>
+          <a:xfrm xmlns:a="http://schemas.openxmlformats.org/drawingml/2006/main">
+            <a:off x="857250" y="1219200"/>
+            <a:ext cx="10477500" cy="742950"/>
           </a:xfrm>
           <a:prstGeom xmlns:a="http://schemas.openxmlformats.org/drawingml/2006/main" prst="rect">
             <a:avLst/>
@@ -8239,7 +8239,7 @@
           <a:lstStyle xmlns:a="http://schemas.openxmlformats.org/drawingml/2006/main"/>
           <a:p xmlns:a="http://schemas.openxmlformats.org/drawingml/2006/main">
             <a:pPr algn="ctr">
-              <a:defRPr sz="2175" b="1">
+              <a:defRPr sz="2100" b="1">
                 <a:solidFill>
                   <a:srgbClr val="17253A"/>
                 </a:solidFill>
@@ -8249,7 +8249,7 @@
               </a:defRPr>
             </a:pPr>
             <a:r>
-              <a:rPr sz="2175" b="1">
+              <a:rPr sz="2100" b="1">
                 <a:solidFill>
                   <a:srgbClr val="17253A"/>
                 </a:solidFill>
@@ -8267,28 +8267,30 @@
           <p:cNvPr id="11" name="">
             <a:extLst xmlns:a="http://schemas.openxmlformats.org/drawingml/2006/main">
               <a:ext uri="{FF2B5EF4-FFF2-40B4-BE49-F238E27FC236}">
-                <a16:creationId xmlns:a16="http://schemas.microsoft.com/office/drawing/2014/main" id="{6DF132AD-1C4B-4DA8-87DD-766595A9D5AC}"/>
-              </a:ext>
-            </a:extLst>
-          </p:cNvPr>
-          <p:cNvSpPr>
-            <a:spLocks xmlns:a="http://schemas.openxmlformats.org/drawingml/2006/main" noGrp="1"/>
-          </p:cNvSpPr>
-          <p:nvPr/>
-        </p:nvSpPr>
-        <p:spPr>
-          <a:xfrm xmlns:a="http://schemas.openxmlformats.org/drawingml/2006/main">
-            <a:off x="1000125" y="2247900"/>
-            <a:ext cx="476250" cy="476250"/>
-          </a:xfrm>
-          <a:prstGeom xmlns:a="http://schemas.openxmlformats.org/drawingml/2006/main" prst="ellipse">
+                <a16:creationId xmlns:a16="http://schemas.microsoft.com/office/drawing/2014/main" id="{D9406DCB-5917-4E4C-AC84-779AFF943B55}"/>
+              </a:ext>
+            </a:extLst>
+          </p:cNvPr>
+          <p:cNvSpPr>
+            <a:spLocks xmlns:a="http://schemas.openxmlformats.org/drawingml/2006/main" noGrp="1"/>
+          </p:cNvSpPr>
+          <p:nvPr/>
+        </p:nvSpPr>
+        <p:spPr>
+          <a:xfrm xmlns:a="http://schemas.openxmlformats.org/drawingml/2006/main">
+            <a:off x="971550" y="2124075"/>
+            <a:ext cx="38100" cy="3524250"/>
+          </a:xfrm>
+          <a:prstGeom xmlns:a="http://schemas.openxmlformats.org/drawingml/2006/main" prst="rect">
             <a:avLst/>
           </a:prstGeom>
           <a:solidFill xmlns:a="http://schemas.openxmlformats.org/drawingml/2006/main">
-            <a:srgbClr val="18324A"/>
+            <a:srgbClr val="2C6E73"/>
           </a:solidFill>
           <a:ln xmlns:a="http://schemas.openxmlformats.org/drawingml/2006/main" w="0">
-            <a:noFill/>
+            <a:solidFill>
+              <a:srgbClr val="2C6E73"/>
+            </a:solidFill>
           </a:ln>
         </p:spPr>
       </p:sp>
@@ -8297,19 +8299,19 @@
           <p:cNvPr id="12" name="">
             <a:extLst xmlns:a="http://schemas.openxmlformats.org/drawingml/2006/main">
               <a:ext uri="{FF2B5EF4-FFF2-40B4-BE49-F238E27FC236}">
-                <a16:creationId xmlns:a16="http://schemas.microsoft.com/office/drawing/2014/main" id="{3C25F3F7-80D6-45B8-A0F3-C7387CFA2401}"/>
-              </a:ext>
-            </a:extLst>
-          </p:cNvPr>
-          <p:cNvSpPr>
-            <a:spLocks xmlns:a="http://schemas.openxmlformats.org/drawingml/2006/main" noGrp="1"/>
-          </p:cNvSpPr>
-          <p:nvPr/>
-        </p:nvSpPr>
-        <p:spPr>
-          <a:xfrm xmlns:a="http://schemas.openxmlformats.org/drawingml/2006/main">
-            <a:off x="1000125" y="2276475"/>
-            <a:ext cx="476250" cy="419100"/>
+                <a16:creationId xmlns:a16="http://schemas.microsoft.com/office/drawing/2014/main" id="{1EB19B25-3B21-4607-90C2-F56DE35BE1D9}"/>
+              </a:ext>
+            </a:extLst>
+          </p:cNvPr>
+          <p:cNvSpPr>
+            <a:spLocks xmlns:a="http://schemas.openxmlformats.org/drawingml/2006/main" noGrp="1"/>
+          </p:cNvSpPr>
+          <p:nvPr/>
+        </p:nvSpPr>
+        <p:spPr>
+          <a:xfrm xmlns:a="http://schemas.openxmlformats.org/drawingml/2006/main">
+            <a:off x="1162050" y="2200275"/>
+            <a:ext cx="400050" cy="400050"/>
           </a:xfrm>
           <a:prstGeom xmlns:a="http://schemas.openxmlformats.org/drawingml/2006/main" prst="rect">
             <a:avLst/>
@@ -8326,9 +8328,9 @@
           <a:lstStyle xmlns:a="http://schemas.openxmlformats.org/drawingml/2006/main"/>
           <a:p xmlns:a="http://schemas.openxmlformats.org/drawingml/2006/main">
             <a:pPr algn="ctr">
-              <a:defRPr sz="1350" b="1">
-                <a:solidFill>
-                  <a:srgbClr val="FFFFFF"/>
+              <a:defRPr sz="1125" b="1">
+                <a:solidFill>
+                  <a:srgbClr val="2C6E73"/>
                 </a:solidFill>
                 <a:latin typeface="Arial"/>
                 <a:ea typeface="Arial"/>
@@ -8336,9 +8338,9 @@
               </a:defRPr>
             </a:pPr>
             <a:r>
-              <a:rPr sz="1350" b="1">
-                <a:solidFill>
-                  <a:srgbClr val="FFFFFF"/>
+              <a:rPr sz="1125" b="1">
+                <a:solidFill>
+                  <a:srgbClr val="2C6E73"/>
                 </a:solidFill>
                 <a:latin typeface="Arial"/>
                 <a:ea typeface="Arial"/>
@@ -8354,19 +8356,19 @@
           <p:cNvPr id="13" name="">
             <a:extLst xmlns:a="http://schemas.openxmlformats.org/drawingml/2006/main">
               <a:ext uri="{FF2B5EF4-FFF2-40B4-BE49-F238E27FC236}">
-                <a16:creationId xmlns:a16="http://schemas.microsoft.com/office/drawing/2014/main" id="{EBDF5B45-4BB5-4644-9731-3C9A5FA82871}"/>
-              </a:ext>
-            </a:extLst>
-          </p:cNvPr>
-          <p:cNvSpPr>
-            <a:spLocks xmlns:a="http://schemas.openxmlformats.org/drawingml/2006/main" noGrp="1"/>
-          </p:cNvSpPr>
-          <p:nvPr/>
-        </p:nvSpPr>
-        <p:spPr>
-          <a:xfrm xmlns:a="http://schemas.openxmlformats.org/drawingml/2006/main">
-            <a:off x="1714500" y="2181225"/>
-            <a:ext cx="9429750" cy="609600"/>
+                <a16:creationId xmlns:a16="http://schemas.microsoft.com/office/drawing/2014/main" id="{759A0389-D38C-468F-A300-160A56F6EE39}"/>
+              </a:ext>
+            </a:extLst>
+          </p:cNvPr>
+          <p:cNvSpPr>
+            <a:spLocks xmlns:a="http://schemas.openxmlformats.org/drawingml/2006/main" noGrp="1"/>
+          </p:cNvSpPr>
+          <p:nvPr/>
+        </p:nvSpPr>
+        <p:spPr>
+          <a:xfrm xmlns:a="http://schemas.openxmlformats.org/drawingml/2006/main">
+            <a:off x="1714500" y="2114550"/>
+            <a:ext cx="9525000" cy="809625"/>
           </a:xfrm>
           <a:prstGeom xmlns:a="http://schemas.openxmlformats.org/drawingml/2006/main" prst="rect">
             <a:avLst/>
@@ -8383,7 +8385,7 @@
           <a:lstStyle xmlns:a="http://schemas.openxmlformats.org/drawingml/2006/main"/>
           <a:p xmlns:a="http://schemas.openxmlformats.org/drawingml/2006/main">
             <a:pPr algn="l">
-              <a:defRPr sz="1500" b="0">
+              <a:defRPr sz="1725" b="0">
                 <a:solidFill>
                   <a:srgbClr val="17253A"/>
                 </a:solidFill>
@@ -8393,7 +8395,7 @@
               </a:defRPr>
             </a:pPr>
             <a:r>
-              <a:rPr sz="1500" b="0">
+              <a:rPr sz="1725" b="0">
                 <a:solidFill>
                   <a:srgbClr val="17253A"/>
                 </a:solidFill>
@@ -8401,7 +8403,7 @@
                 <a:ea typeface="Arial"/>
                 <a:cs typeface="Arial"/>
               </a:rPr>
-              <a:t>Identify the structure: State whether the task concerns factors or multiples.</a:t>
+              <a:t>Multiples of 18: 18, 36, 54, 72, ...</a:t>
             </a:r>
           </a:p>
         </p:txBody>
@@ -8411,28 +8413,30 @@
           <p:cNvPr id="14" name="">
             <a:extLst xmlns:a="http://schemas.openxmlformats.org/drawingml/2006/main">
               <a:ext uri="{FF2B5EF4-FFF2-40B4-BE49-F238E27FC236}">
-                <a16:creationId xmlns:a16="http://schemas.microsoft.com/office/drawing/2014/main" id="{AE238F74-592A-4C62-856C-F305FF0DEA7C}"/>
-              </a:ext>
-            </a:extLst>
-          </p:cNvPr>
-          <p:cNvSpPr>
-            <a:spLocks xmlns:a="http://schemas.openxmlformats.org/drawingml/2006/main" noGrp="1"/>
-          </p:cNvSpPr>
-          <p:nvPr/>
-        </p:nvSpPr>
-        <p:spPr>
-          <a:xfrm xmlns:a="http://schemas.openxmlformats.org/drawingml/2006/main">
-            <a:off x="1000125" y="2990850"/>
-            <a:ext cx="476250" cy="476250"/>
-          </a:xfrm>
-          <a:prstGeom xmlns:a="http://schemas.openxmlformats.org/drawingml/2006/main" prst="ellipse">
+                <a16:creationId xmlns:a16="http://schemas.microsoft.com/office/drawing/2014/main" id="{B8F94906-5DD1-4E4A-9607-D24DA1D56B15}"/>
+              </a:ext>
+            </a:extLst>
+          </p:cNvPr>
+          <p:cNvSpPr>
+            <a:spLocks xmlns:a="http://schemas.openxmlformats.org/drawingml/2006/main" noGrp="1"/>
+          </p:cNvSpPr>
+          <p:nvPr/>
+        </p:nvSpPr>
+        <p:spPr>
+          <a:xfrm xmlns:a="http://schemas.openxmlformats.org/drawingml/2006/main">
+            <a:off x="1714500" y="2943225"/>
+            <a:ext cx="9334500" cy="9525"/>
+          </a:xfrm>
+          <a:prstGeom xmlns:a="http://schemas.openxmlformats.org/drawingml/2006/main" prst="rect">
             <a:avLst/>
           </a:prstGeom>
           <a:solidFill xmlns:a="http://schemas.openxmlformats.org/drawingml/2006/main">
-            <a:srgbClr val="2C6E73"/>
+            <a:srgbClr val="D9E0E6"/>
           </a:solidFill>
           <a:ln xmlns:a="http://schemas.openxmlformats.org/drawingml/2006/main" w="0">
-            <a:noFill/>
+            <a:solidFill>
+              <a:srgbClr val="D9E0E6"/>
+            </a:solidFill>
           </a:ln>
         </p:spPr>
       </p:sp>
@@ -8441,19 +8445,19 @@
           <p:cNvPr id="15" name="">
             <a:extLst xmlns:a="http://schemas.openxmlformats.org/drawingml/2006/main">
               <a:ext uri="{FF2B5EF4-FFF2-40B4-BE49-F238E27FC236}">
-                <a16:creationId xmlns:a16="http://schemas.microsoft.com/office/drawing/2014/main" id="{5BDEE916-58E3-45A0-AFDB-78C10271D8AF}"/>
-              </a:ext>
-            </a:extLst>
-          </p:cNvPr>
-          <p:cNvSpPr>
-            <a:spLocks xmlns:a="http://schemas.openxmlformats.org/drawingml/2006/main" noGrp="1"/>
-          </p:cNvSpPr>
-          <p:nvPr/>
-        </p:nvSpPr>
-        <p:spPr>
-          <a:xfrm xmlns:a="http://schemas.openxmlformats.org/drawingml/2006/main">
-            <a:off x="1000125" y="3019425"/>
-            <a:ext cx="476250" cy="419100"/>
+                <a16:creationId xmlns:a16="http://schemas.microsoft.com/office/drawing/2014/main" id="{2780D3A2-1B45-48A0-B7C9-D8BFC6E1322E}"/>
+              </a:ext>
+            </a:extLst>
+          </p:cNvPr>
+          <p:cNvSpPr>
+            <a:spLocks xmlns:a="http://schemas.openxmlformats.org/drawingml/2006/main" noGrp="1"/>
+          </p:cNvSpPr>
+          <p:nvPr/>
+        </p:nvSpPr>
+        <p:spPr>
+          <a:xfrm xmlns:a="http://schemas.openxmlformats.org/drawingml/2006/main">
+            <a:off x="1162050" y="3076575"/>
+            <a:ext cx="400050" cy="400050"/>
           </a:xfrm>
           <a:prstGeom xmlns:a="http://schemas.openxmlformats.org/drawingml/2006/main" prst="rect">
             <a:avLst/>
@@ -8470,9 +8474,9 @@
           <a:lstStyle xmlns:a="http://schemas.openxmlformats.org/drawingml/2006/main"/>
           <a:p xmlns:a="http://schemas.openxmlformats.org/drawingml/2006/main">
             <a:pPr algn="ctr">
-              <a:defRPr sz="1350" b="1">
-                <a:solidFill>
-                  <a:srgbClr val="FFFFFF"/>
+              <a:defRPr sz="1125" b="1">
+                <a:solidFill>
+                  <a:srgbClr val="2C6E73"/>
                 </a:solidFill>
                 <a:latin typeface="Arial"/>
                 <a:ea typeface="Arial"/>
@@ -8480,9 +8484,9 @@
               </a:defRPr>
             </a:pPr>
             <a:r>
-              <a:rPr sz="1350" b="1">
-                <a:solidFill>
-                  <a:srgbClr val="FFFFFF"/>
+              <a:rPr sz="1125" b="1">
+                <a:solidFill>
+                  <a:srgbClr val="2C6E73"/>
                 </a:solidFill>
                 <a:latin typeface="Arial"/>
                 <a:ea typeface="Arial"/>
@@ -8498,19 +8502,19 @@
           <p:cNvPr id="16" name="">
             <a:extLst xmlns:a="http://schemas.openxmlformats.org/drawingml/2006/main">
               <a:ext uri="{FF2B5EF4-FFF2-40B4-BE49-F238E27FC236}">
-                <a16:creationId xmlns:a16="http://schemas.microsoft.com/office/drawing/2014/main" id="{F64E85DE-5E7B-4DEC-A4CD-B1D64320C198}"/>
-              </a:ext>
-            </a:extLst>
-          </p:cNvPr>
-          <p:cNvSpPr>
-            <a:spLocks xmlns:a="http://schemas.openxmlformats.org/drawingml/2006/main" noGrp="1"/>
-          </p:cNvSpPr>
-          <p:nvPr/>
-        </p:nvSpPr>
-        <p:spPr>
-          <a:xfrm xmlns:a="http://schemas.openxmlformats.org/drawingml/2006/main">
-            <a:off x="1714500" y="2924175"/>
-            <a:ext cx="9429750" cy="609600"/>
+                <a16:creationId xmlns:a16="http://schemas.microsoft.com/office/drawing/2014/main" id="{CB1A9CC5-93D0-4FD9-89B4-328929601994}"/>
+              </a:ext>
+            </a:extLst>
+          </p:cNvPr>
+          <p:cNvSpPr>
+            <a:spLocks xmlns:a="http://schemas.openxmlformats.org/drawingml/2006/main" noGrp="1"/>
+          </p:cNvSpPr>
+          <p:nvPr/>
+        </p:nvSpPr>
+        <p:spPr>
+          <a:xfrm xmlns:a="http://schemas.openxmlformats.org/drawingml/2006/main">
+            <a:off x="1714500" y="2990850"/>
+            <a:ext cx="9525000" cy="809625"/>
           </a:xfrm>
           <a:prstGeom xmlns:a="http://schemas.openxmlformats.org/drawingml/2006/main" prst="rect">
             <a:avLst/>
@@ -8527,7 +8531,7 @@
           <a:lstStyle xmlns:a="http://schemas.openxmlformats.org/drawingml/2006/main"/>
           <a:p xmlns:a="http://schemas.openxmlformats.org/drawingml/2006/main">
             <a:pPr algn="l">
-              <a:defRPr sz="1500" b="0">
+              <a:defRPr sz="1725" b="0">
                 <a:solidFill>
                   <a:srgbClr val="17253A"/>
                 </a:solidFill>
@@ -8537,7 +8541,7 @@
               </a:defRPr>
             </a:pPr>
             <a:r>
-              <a:rPr sz="1500" b="0">
+              <a:rPr sz="1725" b="0">
                 <a:solidFill>
                   <a:srgbClr val="17253A"/>
                 </a:solidFill>
@@ -8545,7 +8549,7 @@
                 <a:ea typeface="Arial"/>
                 <a:cs typeface="Arial"/>
               </a:rPr>
-              <a:t>Set up the method: Work systematically from the smallest possible factor or multiple.</a:t>
+              <a:t>Multiples of 24: 24, 48, 72, ...</a:t>
             </a:r>
           </a:p>
         </p:txBody>
@@ -8555,28 +8559,30 @@
           <p:cNvPr id="17" name="">
             <a:extLst xmlns:a="http://schemas.openxmlformats.org/drawingml/2006/main">
               <a:ext uri="{FF2B5EF4-FFF2-40B4-BE49-F238E27FC236}">
-                <a16:creationId xmlns:a16="http://schemas.microsoft.com/office/drawing/2014/main" id="{67B71F67-44E3-497E-9362-00300A2F8255}"/>
-              </a:ext>
-            </a:extLst>
-          </p:cNvPr>
-          <p:cNvSpPr>
-            <a:spLocks xmlns:a="http://schemas.openxmlformats.org/drawingml/2006/main" noGrp="1"/>
-          </p:cNvSpPr>
-          <p:nvPr/>
-        </p:nvSpPr>
-        <p:spPr>
-          <a:xfrm xmlns:a="http://schemas.openxmlformats.org/drawingml/2006/main">
-            <a:off x="1000125" y="3733800"/>
-            <a:ext cx="476250" cy="476250"/>
-          </a:xfrm>
-          <a:prstGeom xmlns:a="http://schemas.openxmlformats.org/drawingml/2006/main" prst="ellipse">
+                <a16:creationId xmlns:a16="http://schemas.microsoft.com/office/drawing/2014/main" id="{EBD61DB7-205F-4F96-9822-A2A1FB4100B0}"/>
+              </a:ext>
+            </a:extLst>
+          </p:cNvPr>
+          <p:cNvSpPr>
+            <a:spLocks xmlns:a="http://schemas.openxmlformats.org/drawingml/2006/main" noGrp="1"/>
+          </p:cNvSpPr>
+          <p:nvPr/>
+        </p:nvSpPr>
+        <p:spPr>
+          <a:xfrm xmlns:a="http://schemas.openxmlformats.org/drawingml/2006/main">
+            <a:off x="1714500" y="3819525"/>
+            <a:ext cx="9334500" cy="9525"/>
+          </a:xfrm>
+          <a:prstGeom xmlns:a="http://schemas.openxmlformats.org/drawingml/2006/main" prst="rect">
             <a:avLst/>
           </a:prstGeom>
           <a:solidFill xmlns:a="http://schemas.openxmlformats.org/drawingml/2006/main">
-            <a:srgbClr val="2C6E73"/>
+            <a:srgbClr val="D9E0E6"/>
           </a:solidFill>
           <a:ln xmlns:a="http://schemas.openxmlformats.org/drawingml/2006/main" w="0">
-            <a:noFill/>
+            <a:solidFill>
+              <a:srgbClr val="D9E0E6"/>
+            </a:solidFill>
           </a:ln>
         </p:spPr>
       </p:sp>
@@ -8585,19 +8591,19 @@
           <p:cNvPr id="18" name="">
             <a:extLst xmlns:a="http://schemas.openxmlformats.org/drawingml/2006/main">
               <a:ext uri="{FF2B5EF4-FFF2-40B4-BE49-F238E27FC236}">
-                <a16:creationId xmlns:a16="http://schemas.microsoft.com/office/drawing/2014/main" id="{74EE9F93-A9B7-47AA-A66D-9775A9BB006A}"/>
-              </a:ext>
-            </a:extLst>
-          </p:cNvPr>
-          <p:cNvSpPr>
-            <a:spLocks xmlns:a="http://schemas.openxmlformats.org/drawingml/2006/main" noGrp="1"/>
-          </p:cNvSpPr>
-          <p:nvPr/>
-        </p:nvSpPr>
-        <p:spPr>
-          <a:xfrm xmlns:a="http://schemas.openxmlformats.org/drawingml/2006/main">
-            <a:off x="1000125" y="3762375"/>
-            <a:ext cx="476250" cy="419100"/>
+                <a16:creationId xmlns:a16="http://schemas.microsoft.com/office/drawing/2014/main" id="{EA571214-9700-40A3-811A-98498F9E05C2}"/>
+              </a:ext>
+            </a:extLst>
+          </p:cNvPr>
+          <p:cNvSpPr>
+            <a:spLocks xmlns:a="http://schemas.openxmlformats.org/drawingml/2006/main" noGrp="1"/>
+          </p:cNvSpPr>
+          <p:nvPr/>
+        </p:nvSpPr>
+        <p:spPr>
+          <a:xfrm xmlns:a="http://schemas.openxmlformats.org/drawingml/2006/main">
+            <a:off x="1162050" y="3952875"/>
+            <a:ext cx="400050" cy="400050"/>
           </a:xfrm>
           <a:prstGeom xmlns:a="http://schemas.openxmlformats.org/drawingml/2006/main" prst="rect">
             <a:avLst/>
@@ -8614,9 +8620,9 @@
           <a:lstStyle xmlns:a="http://schemas.openxmlformats.org/drawingml/2006/main"/>
           <a:p xmlns:a="http://schemas.openxmlformats.org/drawingml/2006/main">
             <a:pPr algn="ctr">
-              <a:defRPr sz="1350" b="1">
-                <a:solidFill>
-                  <a:srgbClr val="FFFFFF"/>
+              <a:defRPr sz="1125" b="1">
+                <a:solidFill>
+                  <a:srgbClr val="2C6E73"/>
                 </a:solidFill>
                 <a:latin typeface="Arial"/>
                 <a:ea typeface="Arial"/>
@@ -8624,9 +8630,9 @@
               </a:defRPr>
             </a:pPr>
             <a:r>
-              <a:rPr sz="1350" b="1">
-                <a:solidFill>
-                  <a:srgbClr val="FFFFFF"/>
+              <a:rPr sz="1125" b="1">
+                <a:solidFill>
+                  <a:srgbClr val="2C6E73"/>
                 </a:solidFill>
                 <a:latin typeface="Arial"/>
                 <a:ea typeface="Arial"/>
@@ -8642,19 +8648,19 @@
           <p:cNvPr id="19" name="">
             <a:extLst xmlns:a="http://schemas.openxmlformats.org/drawingml/2006/main">
               <a:ext uri="{FF2B5EF4-FFF2-40B4-BE49-F238E27FC236}">
-                <a16:creationId xmlns:a16="http://schemas.microsoft.com/office/drawing/2014/main" id="{FF8C5630-C50B-40AF-81E4-BEDC4CD61BDD}"/>
-              </a:ext>
-            </a:extLst>
-          </p:cNvPr>
-          <p:cNvSpPr>
-            <a:spLocks xmlns:a="http://schemas.openxmlformats.org/drawingml/2006/main" noGrp="1"/>
-          </p:cNvSpPr>
-          <p:nvPr/>
-        </p:nvSpPr>
-        <p:spPr>
-          <a:xfrm xmlns:a="http://schemas.openxmlformats.org/drawingml/2006/main">
-            <a:off x="1714500" y="3667125"/>
-            <a:ext cx="9429750" cy="609600"/>
+                <a16:creationId xmlns:a16="http://schemas.microsoft.com/office/drawing/2014/main" id="{6FEB5940-40E2-4A78-94BC-D89FD5C66139}"/>
+              </a:ext>
+            </a:extLst>
+          </p:cNvPr>
+          <p:cNvSpPr>
+            <a:spLocks xmlns:a="http://schemas.openxmlformats.org/drawingml/2006/main" noGrp="1"/>
+          </p:cNvSpPr>
+          <p:nvPr/>
+        </p:nvSpPr>
+        <p:spPr>
+          <a:xfrm xmlns:a="http://schemas.openxmlformats.org/drawingml/2006/main">
+            <a:off x="1714500" y="3867150"/>
+            <a:ext cx="9525000" cy="809625"/>
           </a:xfrm>
           <a:prstGeom xmlns:a="http://schemas.openxmlformats.org/drawingml/2006/main" prst="rect">
             <a:avLst/>
@@ -8671,7 +8677,7 @@
           <a:lstStyle xmlns:a="http://schemas.openxmlformats.org/drawingml/2006/main"/>
           <a:p xmlns:a="http://schemas.openxmlformats.org/drawingml/2006/main">
             <a:pPr algn="l">
-              <a:defRPr sz="1500" b="0">
+              <a:defRPr sz="1725" b="0">
                 <a:solidFill>
                   <a:srgbClr val="17253A"/>
                 </a:solidFill>
@@ -8681,7 +8687,7 @@
               </a:defRPr>
             </a:pPr>
             <a:r>
-              <a:rPr sz="1500" b="0">
+              <a:rPr sz="1725" b="0">
                 <a:solidFill>
                   <a:srgbClr val="17253A"/>
                 </a:solidFill>
@@ -8689,7 +8695,7 @@
                 <a:ea typeface="Arial"/>
                 <a:cs typeface="Arial"/>
               </a:rPr>
-              <a:t>Complete the calculation: 72.</a:t>
+              <a:t>First common multiple = 72</a:t>
             </a:r>
           </a:p>
         </p:txBody>
@@ -8699,28 +8705,30 @@
           <p:cNvPr id="20" name="">
             <a:extLst xmlns:a="http://schemas.openxmlformats.org/drawingml/2006/main">
               <a:ext uri="{FF2B5EF4-FFF2-40B4-BE49-F238E27FC236}">
-                <a16:creationId xmlns:a16="http://schemas.microsoft.com/office/drawing/2014/main" id="{D20576E0-B46F-4047-9995-80AD32D8983C}"/>
-              </a:ext>
-            </a:extLst>
-          </p:cNvPr>
-          <p:cNvSpPr>
-            <a:spLocks xmlns:a="http://schemas.openxmlformats.org/drawingml/2006/main" noGrp="1"/>
-          </p:cNvSpPr>
-          <p:nvPr/>
-        </p:nvSpPr>
-        <p:spPr>
-          <a:xfrm xmlns:a="http://schemas.openxmlformats.org/drawingml/2006/main">
-            <a:off x="1000125" y="4476750"/>
-            <a:ext cx="476250" cy="476250"/>
-          </a:xfrm>
-          <a:prstGeom xmlns:a="http://schemas.openxmlformats.org/drawingml/2006/main" prst="ellipse">
+                <a16:creationId xmlns:a16="http://schemas.microsoft.com/office/drawing/2014/main" id="{D7C56B84-6414-4982-A8AB-30602F5D9E6C}"/>
+              </a:ext>
+            </a:extLst>
+          </p:cNvPr>
+          <p:cNvSpPr>
+            <a:spLocks xmlns:a="http://schemas.openxmlformats.org/drawingml/2006/main" noGrp="1"/>
+          </p:cNvSpPr>
+          <p:nvPr/>
+        </p:nvSpPr>
+        <p:spPr>
+          <a:xfrm xmlns:a="http://schemas.openxmlformats.org/drawingml/2006/main">
+            <a:off x="1714500" y="4695825"/>
+            <a:ext cx="9334500" cy="9525"/>
+          </a:xfrm>
+          <a:prstGeom xmlns:a="http://schemas.openxmlformats.org/drawingml/2006/main" prst="rect">
             <a:avLst/>
           </a:prstGeom>
           <a:solidFill xmlns:a="http://schemas.openxmlformats.org/drawingml/2006/main">
-            <a:srgbClr val="2C6E73"/>
+            <a:srgbClr val="D9E0E6"/>
           </a:solidFill>
           <a:ln xmlns:a="http://schemas.openxmlformats.org/drawingml/2006/main" w="0">
-            <a:noFill/>
+            <a:solidFill>
+              <a:srgbClr val="D9E0E6"/>
+            </a:solidFill>
           </a:ln>
         </p:spPr>
       </p:sp>
@@ -8729,19 +8737,19 @@
           <p:cNvPr id="21" name="">
             <a:extLst xmlns:a="http://schemas.openxmlformats.org/drawingml/2006/main">
               <a:ext uri="{FF2B5EF4-FFF2-40B4-BE49-F238E27FC236}">
-                <a16:creationId xmlns:a16="http://schemas.microsoft.com/office/drawing/2014/main" id="{48C07447-39B5-419A-916A-8F77FC68E777}"/>
-              </a:ext>
-            </a:extLst>
-          </p:cNvPr>
-          <p:cNvSpPr>
-            <a:spLocks xmlns:a="http://schemas.openxmlformats.org/drawingml/2006/main" noGrp="1"/>
-          </p:cNvSpPr>
-          <p:nvPr/>
-        </p:nvSpPr>
-        <p:spPr>
-          <a:xfrm xmlns:a="http://schemas.openxmlformats.org/drawingml/2006/main">
-            <a:off x="1000125" y="4505325"/>
-            <a:ext cx="476250" cy="419100"/>
+                <a16:creationId xmlns:a16="http://schemas.microsoft.com/office/drawing/2014/main" id="{1CA32B75-9888-4E9B-A594-8753561322D5}"/>
+              </a:ext>
+            </a:extLst>
+          </p:cNvPr>
+          <p:cNvSpPr>
+            <a:spLocks xmlns:a="http://schemas.openxmlformats.org/drawingml/2006/main" noGrp="1"/>
+          </p:cNvSpPr>
+          <p:nvPr/>
+        </p:nvSpPr>
+        <p:spPr>
+          <a:xfrm xmlns:a="http://schemas.openxmlformats.org/drawingml/2006/main">
+            <a:off x="1162050" y="4829175"/>
+            <a:ext cx="400050" cy="400050"/>
           </a:xfrm>
           <a:prstGeom xmlns:a="http://schemas.openxmlformats.org/drawingml/2006/main" prst="rect">
             <a:avLst/>
@@ -8758,9 +8766,9 @@
           <a:lstStyle xmlns:a="http://schemas.openxmlformats.org/drawingml/2006/main"/>
           <a:p xmlns:a="http://schemas.openxmlformats.org/drawingml/2006/main">
             <a:pPr algn="ctr">
-              <a:defRPr sz="1350" b="1">
-                <a:solidFill>
-                  <a:srgbClr val="FFFFFF"/>
+              <a:defRPr sz="1125" b="1">
+                <a:solidFill>
+                  <a:srgbClr val="2F785D"/>
                 </a:solidFill>
                 <a:latin typeface="Arial"/>
                 <a:ea typeface="Arial"/>
@@ -8768,9 +8776,9 @@
               </a:defRPr>
             </a:pPr>
             <a:r>
-              <a:rPr sz="1350" b="1">
-                <a:solidFill>
-                  <a:srgbClr val="FFFFFF"/>
+              <a:rPr sz="1125" b="1">
+                <a:solidFill>
+                  <a:srgbClr val="2F785D"/>
                 </a:solidFill>
                 <a:latin typeface="Arial"/>
                 <a:ea typeface="Arial"/>
@@ -8786,19 +8794,19 @@
           <p:cNvPr id="22" name="">
             <a:extLst xmlns:a="http://schemas.openxmlformats.org/drawingml/2006/main">
               <a:ext uri="{FF2B5EF4-FFF2-40B4-BE49-F238E27FC236}">
-                <a16:creationId xmlns:a16="http://schemas.microsoft.com/office/drawing/2014/main" id="{A49C99F0-A8DD-4272-B578-F14DABB05D09}"/>
-              </a:ext>
-            </a:extLst>
-          </p:cNvPr>
-          <p:cNvSpPr>
-            <a:spLocks xmlns:a="http://schemas.openxmlformats.org/drawingml/2006/main" noGrp="1"/>
-          </p:cNvSpPr>
-          <p:nvPr/>
-        </p:nvSpPr>
-        <p:spPr>
-          <a:xfrm xmlns:a="http://schemas.openxmlformats.org/drawingml/2006/main">
-            <a:off x="1714500" y="4410075"/>
-            <a:ext cx="9429750" cy="609600"/>
+                <a16:creationId xmlns:a16="http://schemas.microsoft.com/office/drawing/2014/main" id="{68343401-8872-45C1-A2BC-CA4E0E439E20}"/>
+              </a:ext>
+            </a:extLst>
+          </p:cNvPr>
+          <p:cNvSpPr>
+            <a:spLocks xmlns:a="http://schemas.openxmlformats.org/drawingml/2006/main" noGrp="1"/>
+          </p:cNvSpPr>
+          <p:nvPr/>
+        </p:nvSpPr>
+        <p:spPr>
+          <a:xfrm xmlns:a="http://schemas.openxmlformats.org/drawingml/2006/main">
+            <a:off x="1714500" y="4743450"/>
+            <a:ext cx="9525000" cy="809625"/>
           </a:xfrm>
           <a:prstGeom xmlns:a="http://schemas.openxmlformats.org/drawingml/2006/main" prst="rect">
             <a:avLst/>
@@ -8815,7 +8823,7 @@
           <a:lstStyle xmlns:a="http://schemas.openxmlformats.org/drawingml/2006/main"/>
           <a:p xmlns:a="http://schemas.openxmlformats.org/drawingml/2006/main">
             <a:pPr algn="l">
-              <a:defRPr sz="1500" b="1">
+              <a:defRPr sz="1725" b="1">
                 <a:solidFill>
                   <a:srgbClr val="2F785D"/>
                 </a:solidFill>
@@ -8825,7 +8833,7 @@
               </a:defRPr>
             </a:pPr>
             <a:r>
-              <a:rPr sz="1500" b="1">
+              <a:rPr sz="1725" b="1">
                 <a:solidFill>
                   <a:srgbClr val="2F785D"/>
                 </a:solidFill>
@@ -8833,7 +8841,7 @@
                 <a:ea typeface="Arial"/>
                 <a:cs typeface="Arial"/>
               </a:rPr>
-              <a:t>Check the result: Check that the list is complete and use it to justify the conclusion.</a:t>
+              <a:t>LCM(18, 24) = 72</a:t>
             </a:r>
           </a:p>
         </p:txBody>
@@ -8841,7 +8849,7 @@
     </p:spTree>
     <p:extLst>
       <p:ext uri="{BB962C8B-B14F-4D97-AF65-F5344CB8AC3E}">
-        <p14:creationId xmlns:p14="http://schemas.microsoft.com/office/powerpoint/2010/main" val="1007129192"/>
+        <p14:creationId xmlns:p14="http://schemas.microsoft.com/office/powerpoint/2010/main" val="512585814"/>
       </p:ext>
     </p:extLst>
   </p:cSld>
@@ -9134,7 +9142,7 @@
           <p:cNvPr id="15" name="">
             <a:extLst xmlns:a="http://schemas.openxmlformats.org/drawingml/2006/main">
               <a:ext uri="{FF2B5EF4-FFF2-40B4-BE49-F238E27FC236}">
-                <a16:creationId xmlns:a16="http://schemas.microsoft.com/office/drawing/2014/main" id="{134EA270-2C4E-48B8-988B-830D4EA23372}"/>
+                <a16:creationId xmlns:a16="http://schemas.microsoft.com/office/drawing/2014/main" id="{423F8F72-30BA-4805-9F5B-89AD954A85C6}"/>
               </a:ext>
             </a:extLst>
           </p:cNvPr>
@@ -9166,7 +9174,7 @@
           <p:cNvPr id="2" name="">
             <a:extLst xmlns:a="http://schemas.openxmlformats.org/drawingml/2006/main">
               <a:ext uri="{FF2B5EF4-FFF2-40B4-BE49-F238E27FC236}">
-                <a16:creationId xmlns:a16="http://schemas.microsoft.com/office/drawing/2014/main" id="{C81F7957-13D3-4918-AEA4-20B5453D786D}"/>
+                <a16:creationId xmlns:a16="http://schemas.microsoft.com/office/drawing/2014/main" id="{1A370E3A-9C91-4992-874D-9A9242415EED}"/>
               </a:ext>
             </a:extLst>
           </p:cNvPr>
@@ -9223,7 +9231,7 @@
           <p:cNvPr id="3" name="">
             <a:extLst xmlns:a="http://schemas.openxmlformats.org/drawingml/2006/main">
               <a:ext uri="{FF2B5EF4-FFF2-40B4-BE49-F238E27FC236}">
-                <a16:creationId xmlns:a16="http://schemas.microsoft.com/office/drawing/2014/main" id="{F5D3138B-B930-4024-A525-6C0939483E38}"/>
+                <a16:creationId xmlns:a16="http://schemas.microsoft.com/office/drawing/2014/main" id="{37E455CC-8DFA-434B-A873-37BEE1961DEB}"/>
               </a:ext>
             </a:extLst>
           </p:cNvPr>
@@ -9255,7 +9263,7 @@
           <p:cNvPr id="4" name="">
             <a:extLst xmlns:a="http://schemas.openxmlformats.org/drawingml/2006/main">
               <a:ext uri="{FF2B5EF4-FFF2-40B4-BE49-F238E27FC236}">
-                <a16:creationId xmlns:a16="http://schemas.microsoft.com/office/drawing/2014/main" id="{0459313B-5D20-4600-98A2-98DB6E1202FF}"/>
+                <a16:creationId xmlns:a16="http://schemas.microsoft.com/office/drawing/2014/main" id="{770278CE-C403-43A0-B5EA-58FBCA6C31C4}"/>
               </a:ext>
             </a:extLst>
           </p:cNvPr>
@@ -9312,7 +9320,7 @@
           <p:cNvPr id="5" name="">
             <a:extLst xmlns:a="http://schemas.openxmlformats.org/drawingml/2006/main">
               <a:ext uri="{FF2B5EF4-FFF2-40B4-BE49-F238E27FC236}">
-                <a16:creationId xmlns:a16="http://schemas.microsoft.com/office/drawing/2014/main" id="{467D59C8-D58D-48EB-AA2A-F04AC2038AF6}"/>
+                <a16:creationId xmlns:a16="http://schemas.microsoft.com/office/drawing/2014/main" id="{CF344BA9-C42D-4D81-8C56-DB5C793ED040}"/>
               </a:ext>
             </a:extLst>
           </p:cNvPr>
@@ -9369,7 +9377,7 @@
           <p:cNvPr id="6" name="">
             <a:extLst xmlns:a="http://schemas.openxmlformats.org/drawingml/2006/main">
               <a:ext uri="{FF2B5EF4-FFF2-40B4-BE49-F238E27FC236}">
-                <a16:creationId xmlns:a16="http://schemas.microsoft.com/office/drawing/2014/main" id="{3F3D3758-548E-4C21-A055-3E9162BBDDE9}"/>
+                <a16:creationId xmlns:a16="http://schemas.microsoft.com/office/drawing/2014/main" id="{D81D52CD-97ED-4565-9867-DAE786948A94}"/>
               </a:ext>
             </a:extLst>
           </p:cNvPr>
@@ -9426,7 +9434,7 @@
           <p:cNvPr id="7" name="">
             <a:extLst xmlns:a="http://schemas.openxmlformats.org/drawingml/2006/main">
               <a:ext uri="{FF2B5EF4-FFF2-40B4-BE49-F238E27FC236}">
-                <a16:creationId xmlns:a16="http://schemas.microsoft.com/office/drawing/2014/main" id="{3B15A7FA-C117-4007-B706-67F56DD8FBEF}"/>
+                <a16:creationId xmlns:a16="http://schemas.microsoft.com/office/drawing/2014/main" id="{A4ED9D10-3931-4327-B3F8-299E4D7EF97C}"/>
               </a:ext>
             </a:extLst>
           </p:cNvPr>
@@ -9458,7 +9466,7 @@
           <p:cNvPr id="8" name="">
             <a:extLst xmlns:a="http://schemas.openxmlformats.org/drawingml/2006/main">
               <a:ext uri="{FF2B5EF4-FFF2-40B4-BE49-F238E27FC236}">
-                <a16:creationId xmlns:a16="http://schemas.microsoft.com/office/drawing/2014/main" id="{4F2679B0-E378-46AC-A339-54603C39DBD1}"/>
+                <a16:creationId xmlns:a16="http://schemas.microsoft.com/office/drawing/2014/main" id="{5B8EC7B4-9BBC-4A46-B773-1A65E68FF38F}"/>
               </a:ext>
             </a:extLst>
           </p:cNvPr>
@@ -9515,7 +9523,7 @@
           <p:cNvPr id="9" name="">
             <a:extLst xmlns:a="http://schemas.openxmlformats.org/drawingml/2006/main">
               <a:ext uri="{FF2B5EF4-FFF2-40B4-BE49-F238E27FC236}">
-                <a16:creationId xmlns:a16="http://schemas.microsoft.com/office/drawing/2014/main" id="{5700F5B9-0244-47A0-9A99-5892B071BB82}"/>
+                <a16:creationId xmlns:a16="http://schemas.microsoft.com/office/drawing/2014/main" id="{26297D0A-DCDC-4696-9996-F72DC309764F}"/>
               </a:ext>
             </a:extLst>
           </p:cNvPr>
@@ -9572,7 +9580,7 @@
           <p:cNvPr id="10" name="">
             <a:extLst xmlns:a="http://schemas.openxmlformats.org/drawingml/2006/main">
               <a:ext uri="{FF2B5EF4-FFF2-40B4-BE49-F238E27FC236}">
-                <a16:creationId xmlns:a16="http://schemas.microsoft.com/office/drawing/2014/main" id="{21F710A0-834F-49C5-8932-68D7EB3F2E00}"/>
+                <a16:creationId xmlns:a16="http://schemas.microsoft.com/office/drawing/2014/main" id="{F4E0708B-8931-4395-AD2E-356FBB026272}"/>
               </a:ext>
             </a:extLst>
           </p:cNvPr>
@@ -9629,7 +9637,7 @@
           <p:cNvPr id="11" name="">
             <a:extLst xmlns:a="http://schemas.openxmlformats.org/drawingml/2006/main">
               <a:ext uri="{FF2B5EF4-FFF2-40B4-BE49-F238E27FC236}">
-                <a16:creationId xmlns:a16="http://schemas.microsoft.com/office/drawing/2014/main" id="{01D85399-90AF-4263-99B0-1307D6DDF46E}"/>
+                <a16:creationId xmlns:a16="http://schemas.microsoft.com/office/drawing/2014/main" id="{FC9B071A-C066-4DFB-8169-149FC3BE9591}"/>
               </a:ext>
             </a:extLst>
           </p:cNvPr>
@@ -9686,7 +9694,7 @@
           <p:cNvPr id="12" name="">
             <a:extLst xmlns:a="http://schemas.openxmlformats.org/drawingml/2006/main">
               <a:ext uri="{FF2B5EF4-FFF2-40B4-BE49-F238E27FC236}">
-                <a16:creationId xmlns:a16="http://schemas.microsoft.com/office/drawing/2014/main" id="{BD8C7C8C-C21A-4D4C-A682-48FB0FD9C858}"/>
+                <a16:creationId xmlns:a16="http://schemas.microsoft.com/office/drawing/2014/main" id="{B94B69C6-9A00-46A6-AC58-403D0ADC3167}"/>
               </a:ext>
             </a:extLst>
           </p:cNvPr>
@@ -9718,7 +9726,7 @@
           <p:cNvPr id="13" name="">
             <a:extLst xmlns:a="http://schemas.openxmlformats.org/drawingml/2006/main">
               <a:ext uri="{FF2B5EF4-FFF2-40B4-BE49-F238E27FC236}">
-                <a16:creationId xmlns:a16="http://schemas.microsoft.com/office/drawing/2014/main" id="{DDD8B9D5-A84B-4C54-9C6E-026CA257AB9B}"/>
+                <a16:creationId xmlns:a16="http://schemas.microsoft.com/office/drawing/2014/main" id="{D604A74E-DAF6-4A95-9053-4B6C23EDB0DC}"/>
               </a:ext>
             </a:extLst>
           </p:cNvPr>
@@ -9775,7 +9783,7 @@
           <p:cNvPr id="14" name="">
             <a:extLst xmlns:a="http://schemas.openxmlformats.org/drawingml/2006/main">
               <a:ext uri="{FF2B5EF4-FFF2-40B4-BE49-F238E27FC236}">
-                <a16:creationId xmlns:a16="http://schemas.microsoft.com/office/drawing/2014/main" id="{DB309979-C82F-4B92-B774-CBFD335E330B}"/>
+                <a16:creationId xmlns:a16="http://schemas.microsoft.com/office/drawing/2014/main" id="{73A57C50-1000-4017-A682-2262D3D2D67E}"/>
               </a:ext>
             </a:extLst>
           </p:cNvPr>
@@ -9830,7 +9838,7 @@
     </p:spTree>
     <p:extLst>
       <p:ext uri="{BB962C8B-B14F-4D97-AF65-F5344CB8AC3E}">
-        <p14:creationId xmlns:p14="http://schemas.microsoft.com/office/powerpoint/2010/main" val="463205174"/>
+        <p14:creationId xmlns:p14="http://schemas.microsoft.com/office/powerpoint/2010/main" val="1874178349"/>
       </p:ext>
     </p:extLst>
   </p:cSld>
@@ -10031,7 +10039,7 @@
           <p:cNvPr id="16" name="">
             <a:extLst xmlns:a="http://schemas.openxmlformats.org/drawingml/2006/main">
               <a:ext uri="{FF2B5EF4-FFF2-40B4-BE49-F238E27FC236}">
-                <a16:creationId xmlns:a16="http://schemas.microsoft.com/office/drawing/2014/main" id="{B35660DF-3238-4BF8-83F5-AEB8047AA289}"/>
+                <a16:creationId xmlns:a16="http://schemas.microsoft.com/office/drawing/2014/main" id="{530C2B9B-35DC-4D49-AE88-4BFE790E8C11}"/>
               </a:ext>
             </a:extLst>
           </p:cNvPr>
@@ -10063,7 +10071,7 @@
           <p:cNvPr id="2" name="">
             <a:extLst xmlns:a="http://schemas.openxmlformats.org/drawingml/2006/main">
               <a:ext uri="{FF2B5EF4-FFF2-40B4-BE49-F238E27FC236}">
-                <a16:creationId xmlns:a16="http://schemas.microsoft.com/office/drawing/2014/main" id="{F50D911C-5A54-4272-AEC6-E6D24065D513}"/>
+                <a16:creationId xmlns:a16="http://schemas.microsoft.com/office/drawing/2014/main" id="{107998FE-0B92-4528-AC2A-19A247A8E7AE}"/>
               </a:ext>
             </a:extLst>
           </p:cNvPr>
@@ -10120,7 +10128,7 @@
           <p:cNvPr id="3" name="">
             <a:extLst xmlns:a="http://schemas.openxmlformats.org/drawingml/2006/main">
               <a:ext uri="{FF2B5EF4-FFF2-40B4-BE49-F238E27FC236}">
-                <a16:creationId xmlns:a16="http://schemas.microsoft.com/office/drawing/2014/main" id="{4AEF7665-F160-4DC5-998E-282D3EDF5E8D}"/>
+                <a16:creationId xmlns:a16="http://schemas.microsoft.com/office/drawing/2014/main" id="{79D9518B-573D-4535-AF7F-0F85F4AA5F32}"/>
               </a:ext>
             </a:extLst>
           </p:cNvPr>
@@ -10152,7 +10160,7 @@
           <p:cNvPr id="4" name="">
             <a:extLst xmlns:a="http://schemas.openxmlformats.org/drawingml/2006/main">
               <a:ext uri="{FF2B5EF4-FFF2-40B4-BE49-F238E27FC236}">
-                <a16:creationId xmlns:a16="http://schemas.microsoft.com/office/drawing/2014/main" id="{917489C9-C7AB-45F2-8ECB-F9922F4989BA}"/>
+                <a16:creationId xmlns:a16="http://schemas.microsoft.com/office/drawing/2014/main" id="{79445748-DE48-4E2D-A061-46259827B353}"/>
               </a:ext>
             </a:extLst>
           </p:cNvPr>
@@ -10209,7 +10217,7 @@
           <p:cNvPr id="5" name="">
             <a:extLst xmlns:a="http://schemas.openxmlformats.org/drawingml/2006/main">
               <a:ext uri="{FF2B5EF4-FFF2-40B4-BE49-F238E27FC236}">
-                <a16:creationId xmlns:a16="http://schemas.microsoft.com/office/drawing/2014/main" id="{259FEA32-0635-4CA6-A5FA-67EB2824E493}"/>
+                <a16:creationId xmlns:a16="http://schemas.microsoft.com/office/drawing/2014/main" id="{B25AC13C-3651-4670-9AEE-C281A91D2BA5}"/>
               </a:ext>
             </a:extLst>
           </p:cNvPr>
@@ -10266,7 +10274,7 @@
           <p:cNvPr id="6" name="">
             <a:extLst xmlns:a="http://schemas.openxmlformats.org/drawingml/2006/main">
               <a:ext uri="{FF2B5EF4-FFF2-40B4-BE49-F238E27FC236}">
-                <a16:creationId xmlns:a16="http://schemas.microsoft.com/office/drawing/2014/main" id="{B789467B-9279-44DE-A41B-F46F91664F8C}"/>
+                <a16:creationId xmlns:a16="http://schemas.microsoft.com/office/drawing/2014/main" id="{180919FD-C8DB-42A2-9572-9ED930B6F775}"/>
               </a:ext>
             </a:extLst>
           </p:cNvPr>
@@ -10323,7 +10331,7 @@
           <p:cNvPr id="7" name="">
             <a:extLst xmlns:a="http://schemas.openxmlformats.org/drawingml/2006/main">
               <a:ext uri="{FF2B5EF4-FFF2-40B4-BE49-F238E27FC236}">
-                <a16:creationId xmlns:a16="http://schemas.microsoft.com/office/drawing/2014/main" id="{E76CD2E1-23FC-469C-933A-92B450E903BF}"/>
+                <a16:creationId xmlns:a16="http://schemas.microsoft.com/office/drawing/2014/main" id="{CBE0AA28-406E-4DF5-91F0-1B52E2F278E1}"/>
               </a:ext>
             </a:extLst>
           </p:cNvPr>
@@ -10355,7 +10363,7 @@
           <p:cNvPr id="8" name="">
             <a:extLst xmlns:a="http://schemas.openxmlformats.org/drawingml/2006/main">
               <a:ext uri="{FF2B5EF4-FFF2-40B4-BE49-F238E27FC236}">
-                <a16:creationId xmlns:a16="http://schemas.microsoft.com/office/drawing/2014/main" id="{CAC3A8B3-4A9A-4117-BEFA-ABC41A8AE746}"/>
+                <a16:creationId xmlns:a16="http://schemas.microsoft.com/office/drawing/2014/main" id="{139E224E-3B76-4D72-8278-918BDBA1AB72}"/>
               </a:ext>
             </a:extLst>
           </p:cNvPr>
@@ -10412,7 +10420,7 @@
           <p:cNvPr id="9" name="">
             <a:extLst xmlns:a="http://schemas.openxmlformats.org/drawingml/2006/main">
               <a:ext uri="{FF2B5EF4-FFF2-40B4-BE49-F238E27FC236}">
-                <a16:creationId xmlns:a16="http://schemas.microsoft.com/office/drawing/2014/main" id="{F70A4685-CCDF-4D67-A8D3-105A15314237}"/>
+                <a16:creationId xmlns:a16="http://schemas.microsoft.com/office/drawing/2014/main" id="{64BF1F25-E0B8-4420-B633-1FC24F23CFBC}"/>
               </a:ext>
             </a:extLst>
           </p:cNvPr>
@@ -10469,7 +10477,7 @@
           <p:cNvPr id="10" name="">
             <a:extLst xmlns:a="http://schemas.openxmlformats.org/drawingml/2006/main">
               <a:ext uri="{FF2B5EF4-FFF2-40B4-BE49-F238E27FC236}">
-                <a16:creationId xmlns:a16="http://schemas.microsoft.com/office/drawing/2014/main" id="{1B96690A-9D59-438B-A4FF-71AF5C560F76}"/>
+                <a16:creationId xmlns:a16="http://schemas.microsoft.com/office/drawing/2014/main" id="{C963A6DE-0AC2-43EF-8B6D-C3EEB804D974}"/>
               </a:ext>
             </a:extLst>
           </p:cNvPr>
@@ -10526,7 +10534,7 @@
           <p:cNvPr id="11" name="">
             <a:extLst xmlns:a="http://schemas.openxmlformats.org/drawingml/2006/main">
               <a:ext uri="{FF2B5EF4-FFF2-40B4-BE49-F238E27FC236}">
-                <a16:creationId xmlns:a16="http://schemas.microsoft.com/office/drawing/2014/main" id="{A3B3FAED-17DB-4D4B-887A-A3B16D8C68D0}"/>
+                <a16:creationId xmlns:a16="http://schemas.microsoft.com/office/drawing/2014/main" id="{8B58C76E-8F7A-4BBB-BE91-A9C18F51BC9E}"/>
               </a:ext>
             </a:extLst>
           </p:cNvPr>
@@ -10583,7 +10591,7 @@
           <p:cNvPr id="12" name="">
             <a:extLst xmlns:a="http://schemas.openxmlformats.org/drawingml/2006/main">
               <a:ext uri="{FF2B5EF4-FFF2-40B4-BE49-F238E27FC236}">
-                <a16:creationId xmlns:a16="http://schemas.microsoft.com/office/drawing/2014/main" id="{9B94E492-5E03-4B46-8B4F-990879E2B411}"/>
+                <a16:creationId xmlns:a16="http://schemas.microsoft.com/office/drawing/2014/main" id="{38B8B906-5686-4139-BC63-E9DF70CEEB64}"/>
               </a:ext>
             </a:extLst>
           </p:cNvPr>
@@ -10640,7 +10648,7 @@
           <p:cNvPr id="13" name="">
             <a:extLst xmlns:a="http://schemas.openxmlformats.org/drawingml/2006/main">
               <a:ext uri="{FF2B5EF4-FFF2-40B4-BE49-F238E27FC236}">
-                <a16:creationId xmlns:a16="http://schemas.microsoft.com/office/drawing/2014/main" id="{2CAF74FB-8063-4CA1-95F8-0DBA4B974C16}"/>
+                <a16:creationId xmlns:a16="http://schemas.microsoft.com/office/drawing/2014/main" id="{3B9B1EC9-3305-4A1C-9644-6A52CA0E2837}"/>
               </a:ext>
             </a:extLst>
           </p:cNvPr>
@@ -10697,7 +10705,7 @@
           <p:cNvPr id="14" name="">
             <a:extLst xmlns:a="http://schemas.openxmlformats.org/drawingml/2006/main">
               <a:ext uri="{FF2B5EF4-FFF2-40B4-BE49-F238E27FC236}">
-                <a16:creationId xmlns:a16="http://schemas.microsoft.com/office/drawing/2014/main" id="{ED633AFF-4BA0-4938-87FA-7F9C2CEE69C4}"/>
+                <a16:creationId xmlns:a16="http://schemas.microsoft.com/office/drawing/2014/main" id="{DF134249-2363-4800-8E4E-A401484039F4}"/>
               </a:ext>
             </a:extLst>
           </p:cNvPr>
@@ -10754,7 +10762,7 @@
           <p:cNvPr id="15" name="">
             <a:extLst xmlns:a="http://schemas.openxmlformats.org/drawingml/2006/main">
               <a:ext uri="{FF2B5EF4-FFF2-40B4-BE49-F238E27FC236}">
-                <a16:creationId xmlns:a16="http://schemas.microsoft.com/office/drawing/2014/main" id="{048EBE07-0C57-4D92-9E8D-3E6C5458D5ED}"/>
+                <a16:creationId xmlns:a16="http://schemas.microsoft.com/office/drawing/2014/main" id="{A6D333C2-84DE-445C-BC42-9F19AA08D964}"/>
               </a:ext>
             </a:extLst>
           </p:cNvPr>
@@ -10809,7 +10817,7 @@
     </p:spTree>
     <p:extLst>
       <p:ext uri="{BB962C8B-B14F-4D97-AF65-F5344CB8AC3E}">
-        <p14:creationId xmlns:p14="http://schemas.microsoft.com/office/powerpoint/2010/main" val="1768482973"/>
+        <p14:creationId xmlns:p14="http://schemas.microsoft.com/office/powerpoint/2010/main" val="648361646"/>
       </p:ext>
     </p:extLst>
   </p:cSld>
@@ -10964,7 +10972,7 @@
           <p:cNvPr id="16" name="">
             <a:extLst xmlns:a="http://schemas.openxmlformats.org/drawingml/2006/main">
               <a:ext uri="{FF2B5EF4-FFF2-40B4-BE49-F238E27FC236}">
-                <a16:creationId xmlns:a16="http://schemas.microsoft.com/office/drawing/2014/main" id="{D4CAEF3B-5176-4BE6-9D00-8C9AF3D9B843}"/>
+                <a16:creationId xmlns:a16="http://schemas.microsoft.com/office/drawing/2014/main" id="{3BDE1737-2531-407B-BE61-B8DCA9ECC14C}"/>
               </a:ext>
             </a:extLst>
           </p:cNvPr>
@@ -10996,7 +11004,7 @@
           <p:cNvPr id="2" name="">
             <a:extLst xmlns:a="http://schemas.openxmlformats.org/drawingml/2006/main">
               <a:ext uri="{FF2B5EF4-FFF2-40B4-BE49-F238E27FC236}">
-                <a16:creationId xmlns:a16="http://schemas.microsoft.com/office/drawing/2014/main" id="{3E2E01C0-B7CD-4B0E-8530-B2D01299C88D}"/>
+                <a16:creationId xmlns:a16="http://schemas.microsoft.com/office/drawing/2014/main" id="{6D8F430D-265E-4CFF-A841-04460BFC6910}"/>
               </a:ext>
             </a:extLst>
           </p:cNvPr>
@@ -11053,7 +11061,7 @@
           <p:cNvPr id="3" name="">
             <a:extLst xmlns:a="http://schemas.openxmlformats.org/drawingml/2006/main">
               <a:ext uri="{FF2B5EF4-FFF2-40B4-BE49-F238E27FC236}">
-                <a16:creationId xmlns:a16="http://schemas.microsoft.com/office/drawing/2014/main" id="{79C4D3BD-DB3A-42B0-ABA6-F162FE801287}"/>
+                <a16:creationId xmlns:a16="http://schemas.microsoft.com/office/drawing/2014/main" id="{A03053DE-ECD8-4C3B-90A0-E18AFA820F63}"/>
               </a:ext>
             </a:extLst>
           </p:cNvPr>
@@ -11085,7 +11093,7 @@
           <p:cNvPr id="4" name="">
             <a:extLst xmlns:a="http://schemas.openxmlformats.org/drawingml/2006/main">
               <a:ext uri="{FF2B5EF4-FFF2-40B4-BE49-F238E27FC236}">
-                <a16:creationId xmlns:a16="http://schemas.microsoft.com/office/drawing/2014/main" id="{D97B922A-D66E-450C-8355-9773384E9B32}"/>
+                <a16:creationId xmlns:a16="http://schemas.microsoft.com/office/drawing/2014/main" id="{7DD4F76E-ADCA-4ED5-85AF-07789B70E5B6}"/>
               </a:ext>
             </a:extLst>
           </p:cNvPr>
@@ -11142,7 +11150,7 @@
           <p:cNvPr id="5" name="">
             <a:extLst xmlns:a="http://schemas.openxmlformats.org/drawingml/2006/main">
               <a:ext uri="{FF2B5EF4-FFF2-40B4-BE49-F238E27FC236}">
-                <a16:creationId xmlns:a16="http://schemas.microsoft.com/office/drawing/2014/main" id="{65F7E89D-52BC-43DF-981E-D936D94E78C6}"/>
+                <a16:creationId xmlns:a16="http://schemas.microsoft.com/office/drawing/2014/main" id="{C28A855E-8784-468D-B40B-E7CE502500AA}"/>
               </a:ext>
             </a:extLst>
           </p:cNvPr>
@@ -11199,7 +11207,7 @@
           <p:cNvPr id="6" name="">
             <a:extLst xmlns:a="http://schemas.openxmlformats.org/drawingml/2006/main">
               <a:ext uri="{FF2B5EF4-FFF2-40B4-BE49-F238E27FC236}">
-                <a16:creationId xmlns:a16="http://schemas.microsoft.com/office/drawing/2014/main" id="{CD4A33AB-CB47-4DE8-8C0E-5E431BEED866}"/>
+                <a16:creationId xmlns:a16="http://schemas.microsoft.com/office/drawing/2014/main" id="{3FC0C55D-7F3E-45A3-8416-A4F73FEDB2E9}"/>
               </a:ext>
             </a:extLst>
           </p:cNvPr>
@@ -11256,7 +11264,7 @@
           <p:cNvPr id="7" name="">
             <a:extLst xmlns:a="http://schemas.openxmlformats.org/drawingml/2006/main">
               <a:ext uri="{FF2B5EF4-FFF2-40B4-BE49-F238E27FC236}">
-                <a16:creationId xmlns:a16="http://schemas.microsoft.com/office/drawing/2014/main" id="{62492EFC-E392-4900-A90E-FD1221987AF9}"/>
+                <a16:creationId xmlns:a16="http://schemas.microsoft.com/office/drawing/2014/main" id="{AFEA22E5-AD92-48DE-AB69-1A98540A6599}"/>
               </a:ext>
             </a:extLst>
           </p:cNvPr>
@@ -11288,7 +11296,7 @@
           <p:cNvPr id="8" name="">
             <a:extLst xmlns:a="http://schemas.openxmlformats.org/drawingml/2006/main">
               <a:ext uri="{FF2B5EF4-FFF2-40B4-BE49-F238E27FC236}">
-                <a16:creationId xmlns:a16="http://schemas.microsoft.com/office/drawing/2014/main" id="{8A72855F-1EDD-4E5E-9C59-C21F66B4551D}"/>
+                <a16:creationId xmlns:a16="http://schemas.microsoft.com/office/drawing/2014/main" id="{AC680ED9-7340-4332-AE6B-969B72DCF089}"/>
               </a:ext>
             </a:extLst>
           </p:cNvPr>
@@ -11345,7 +11353,7 @@
           <p:cNvPr id="9" name="">
             <a:extLst xmlns:a="http://schemas.openxmlformats.org/drawingml/2006/main">
               <a:ext uri="{FF2B5EF4-FFF2-40B4-BE49-F238E27FC236}">
-                <a16:creationId xmlns:a16="http://schemas.microsoft.com/office/drawing/2014/main" id="{452CB92F-31BC-480C-A9C3-F1D5F8B707A5}"/>
+                <a16:creationId xmlns:a16="http://schemas.microsoft.com/office/drawing/2014/main" id="{204053A3-807E-4463-AE69-518AA376AC4F}"/>
               </a:ext>
             </a:extLst>
           </p:cNvPr>
@@ -11406,7 +11414,7 @@
           <p:nvPr/>
         </p:nvPicPr>
         <p:blipFill>
-          <a:blip xmlns:r="http://schemas.openxmlformats.org/officeDocument/2006/relationships" xmlns:a="http://schemas.openxmlformats.org/drawingml/2006/main" r:embed="R11970cc1838444a9"/>
+          <a:blip xmlns:r="http://schemas.openxmlformats.org/officeDocument/2006/relationships" xmlns:a="http://schemas.openxmlformats.org/drawingml/2006/main" r:embed="R71cb53359c90446e"/>
           <a:stretch xmlns:a="http://schemas.openxmlformats.org/drawingml/2006/main"/>
         </p:blipFill>
         <p:spPr>
@@ -11424,7 +11432,7 @@
           <p:cNvPr id="11" name="">
             <a:extLst xmlns:a="http://schemas.openxmlformats.org/drawingml/2006/main">
               <a:ext uri="{FF2B5EF4-FFF2-40B4-BE49-F238E27FC236}">
-                <a16:creationId xmlns:a16="http://schemas.microsoft.com/office/drawing/2014/main" id="{B9D0F265-CD7A-42EF-91B2-F38D15B3933F}"/>
+                <a16:creationId xmlns:a16="http://schemas.microsoft.com/office/drawing/2014/main" id="{6D7A7A42-65BA-43F9-9AF3-3411442B893E}"/>
               </a:ext>
             </a:extLst>
           </p:cNvPr>
@@ -11481,7 +11489,7 @@
           <p:cNvPr id="12" name="">
             <a:extLst xmlns:a="http://schemas.openxmlformats.org/drawingml/2006/main">
               <a:ext uri="{FF2B5EF4-FFF2-40B4-BE49-F238E27FC236}">
-                <a16:creationId xmlns:a16="http://schemas.microsoft.com/office/drawing/2014/main" id="{E96F0BF2-34A3-48F9-B7BF-92035FBCFF64}"/>
+                <a16:creationId xmlns:a16="http://schemas.microsoft.com/office/drawing/2014/main" id="{E1D9782C-0491-47D8-B1BE-4411BEB89CA3}"/>
               </a:ext>
             </a:extLst>
           </p:cNvPr>
@@ -11538,7 +11546,7 @@
           <p:cNvPr id="13" name="">
             <a:extLst xmlns:a="http://schemas.openxmlformats.org/drawingml/2006/main">
               <a:ext uri="{FF2B5EF4-FFF2-40B4-BE49-F238E27FC236}">
-                <a16:creationId xmlns:a16="http://schemas.microsoft.com/office/drawing/2014/main" id="{21F0E3CB-D317-428D-BCC0-1FD8397429BC}"/>
+                <a16:creationId xmlns:a16="http://schemas.microsoft.com/office/drawing/2014/main" id="{F87092FF-9770-4840-8F82-DD51CE56E26B}"/>
               </a:ext>
             </a:extLst>
           </p:cNvPr>
@@ -11570,7 +11578,7 @@
           <p:cNvPr id="14" name="">
             <a:extLst xmlns:a="http://schemas.openxmlformats.org/drawingml/2006/main">
               <a:ext uri="{FF2B5EF4-FFF2-40B4-BE49-F238E27FC236}">
-                <a16:creationId xmlns:a16="http://schemas.microsoft.com/office/drawing/2014/main" id="{E0636E65-FD7C-4DDF-94E7-533A9E830809}"/>
+                <a16:creationId xmlns:a16="http://schemas.microsoft.com/office/drawing/2014/main" id="{51D3CCEA-92FB-43C1-914F-82A833E532E3}"/>
               </a:ext>
             </a:extLst>
           </p:cNvPr>
@@ -11627,7 +11635,7 @@
           <p:cNvPr id="15" name="">
             <a:extLst xmlns:a="http://schemas.openxmlformats.org/drawingml/2006/main">
               <a:ext uri="{FF2B5EF4-FFF2-40B4-BE49-F238E27FC236}">
-                <a16:creationId xmlns:a16="http://schemas.microsoft.com/office/drawing/2014/main" id="{8985701B-8F75-45F4-B5B2-4E0A06B3DAD9}"/>
+                <a16:creationId xmlns:a16="http://schemas.microsoft.com/office/drawing/2014/main" id="{B6DE3BE1-991A-4738-B163-49AF23A98B82}"/>
               </a:ext>
             </a:extLst>
           </p:cNvPr>
@@ -11682,7 +11690,7 @@
     </p:spTree>
     <p:extLst>
       <p:ext uri="{BB962C8B-B14F-4D97-AF65-F5344CB8AC3E}">
-        <p14:creationId xmlns:p14="http://schemas.microsoft.com/office/powerpoint/2010/main" val="190709491"/>
+        <p14:creationId xmlns:p14="http://schemas.microsoft.com/office/powerpoint/2010/main" val="842625781"/>
       </p:ext>
     </p:extLst>
   </p:cSld>
@@ -11837,7 +11845,7 @@
           <p:cNvPr id="23" name="">
             <a:extLst xmlns:a="http://schemas.openxmlformats.org/drawingml/2006/main">
               <a:ext uri="{FF2B5EF4-FFF2-40B4-BE49-F238E27FC236}">
-                <a16:creationId xmlns:a16="http://schemas.microsoft.com/office/drawing/2014/main" id="{E90A6629-FFA0-4B19-9F06-B9FC2B971AE5}"/>
+                <a16:creationId xmlns:a16="http://schemas.microsoft.com/office/drawing/2014/main" id="{55804487-B5F3-44B5-B37F-0CA57E123312}"/>
               </a:ext>
             </a:extLst>
           </p:cNvPr>
@@ -11869,7 +11877,7 @@
           <p:cNvPr id="2" name="">
             <a:extLst xmlns:a="http://schemas.openxmlformats.org/drawingml/2006/main">
               <a:ext uri="{FF2B5EF4-FFF2-40B4-BE49-F238E27FC236}">
-                <a16:creationId xmlns:a16="http://schemas.microsoft.com/office/drawing/2014/main" id="{CC405A96-65B0-4714-A6E7-EEEB0B7EF481}"/>
+                <a16:creationId xmlns:a16="http://schemas.microsoft.com/office/drawing/2014/main" id="{1953B43B-5FFD-4E15-986B-AFFD502E2C91}"/>
               </a:ext>
             </a:extLst>
           </p:cNvPr>
@@ -11926,7 +11934,7 @@
           <p:cNvPr id="3" name="">
             <a:extLst xmlns:a="http://schemas.openxmlformats.org/drawingml/2006/main">
               <a:ext uri="{FF2B5EF4-FFF2-40B4-BE49-F238E27FC236}">
-                <a16:creationId xmlns:a16="http://schemas.microsoft.com/office/drawing/2014/main" id="{700D20E2-6119-4461-9DD2-1772DD45EA2E}"/>
+                <a16:creationId xmlns:a16="http://schemas.microsoft.com/office/drawing/2014/main" id="{112E6B61-80A0-4282-B136-6FAEC2D07AD5}"/>
               </a:ext>
             </a:extLst>
           </p:cNvPr>
@@ -11958,7 +11966,7 @@
           <p:cNvPr id="4" name="">
             <a:extLst xmlns:a="http://schemas.openxmlformats.org/drawingml/2006/main">
               <a:ext uri="{FF2B5EF4-FFF2-40B4-BE49-F238E27FC236}">
-                <a16:creationId xmlns:a16="http://schemas.microsoft.com/office/drawing/2014/main" id="{0ADD9886-68FC-43E4-AE15-EC3497BB827C}"/>
+                <a16:creationId xmlns:a16="http://schemas.microsoft.com/office/drawing/2014/main" id="{2DFCC4B5-93D3-484F-95CE-A25F391A83AC}"/>
               </a:ext>
             </a:extLst>
           </p:cNvPr>
@@ -12015,7 +12023,7 @@
           <p:cNvPr id="5" name="">
             <a:extLst xmlns:a="http://schemas.openxmlformats.org/drawingml/2006/main">
               <a:ext uri="{FF2B5EF4-FFF2-40B4-BE49-F238E27FC236}">
-                <a16:creationId xmlns:a16="http://schemas.microsoft.com/office/drawing/2014/main" id="{B8950C8F-0BB5-4D1C-9FE0-B9437D5D2A41}"/>
+                <a16:creationId xmlns:a16="http://schemas.microsoft.com/office/drawing/2014/main" id="{3B7936C8-3E52-428B-921F-881556CF360D}"/>
               </a:ext>
             </a:extLst>
           </p:cNvPr>
@@ -12072,7 +12080,7 @@
           <p:cNvPr id="6" name="">
             <a:extLst xmlns:a="http://schemas.openxmlformats.org/drawingml/2006/main">
               <a:ext uri="{FF2B5EF4-FFF2-40B4-BE49-F238E27FC236}">
-                <a16:creationId xmlns:a16="http://schemas.microsoft.com/office/drawing/2014/main" id="{17FBEF31-2377-4629-A628-42CFA5E61564}"/>
+                <a16:creationId xmlns:a16="http://schemas.microsoft.com/office/drawing/2014/main" id="{E8176A29-AB73-48EF-A87F-459DE443D9E9}"/>
               </a:ext>
             </a:extLst>
           </p:cNvPr>
@@ -12129,7 +12137,7 @@
           <p:cNvPr id="7" name="">
             <a:extLst xmlns:a="http://schemas.openxmlformats.org/drawingml/2006/main">
               <a:ext uri="{FF2B5EF4-FFF2-40B4-BE49-F238E27FC236}">
-                <a16:creationId xmlns:a16="http://schemas.microsoft.com/office/drawing/2014/main" id="{1451790A-D89D-4C55-A127-0A512CA3E083}"/>
+                <a16:creationId xmlns:a16="http://schemas.microsoft.com/office/drawing/2014/main" id="{C47A3B5E-2AAA-4417-897D-44C0212C7EC9}"/>
               </a:ext>
             </a:extLst>
           </p:cNvPr>
@@ -12161,7 +12169,7 @@
           <p:cNvPr id="8" name="">
             <a:extLst xmlns:a="http://schemas.openxmlformats.org/drawingml/2006/main">
               <a:ext uri="{FF2B5EF4-FFF2-40B4-BE49-F238E27FC236}">
-                <a16:creationId xmlns:a16="http://schemas.microsoft.com/office/drawing/2014/main" id="{C526BCBF-21E5-4296-B76C-6B4B9D9E8196}"/>
+                <a16:creationId xmlns:a16="http://schemas.microsoft.com/office/drawing/2014/main" id="{506B2291-C779-4533-B17A-8C8DE19B26DD}"/>
               </a:ext>
             </a:extLst>
           </p:cNvPr>
@@ -12218,7 +12226,7 @@
           <p:cNvPr id="9" name="">
             <a:extLst xmlns:a="http://schemas.openxmlformats.org/drawingml/2006/main">
               <a:ext uri="{FF2B5EF4-FFF2-40B4-BE49-F238E27FC236}">
-                <a16:creationId xmlns:a16="http://schemas.microsoft.com/office/drawing/2014/main" id="{F3733569-A2BD-4B3A-A9E1-1305A9EA8EAE}"/>
+                <a16:creationId xmlns:a16="http://schemas.microsoft.com/office/drawing/2014/main" id="{462D2917-500E-41AD-BCDF-3C46B3A5DD4C}"/>
               </a:ext>
             </a:extLst>
           </p:cNvPr>
@@ -12275,7 +12283,7 @@
           <p:cNvPr id="10" name="">
             <a:extLst xmlns:a="http://schemas.openxmlformats.org/drawingml/2006/main">
               <a:ext uri="{FF2B5EF4-FFF2-40B4-BE49-F238E27FC236}">
-                <a16:creationId xmlns:a16="http://schemas.microsoft.com/office/drawing/2014/main" id="{5D5A840D-9D92-4AE7-8C48-D7CD55CE2E34}"/>
+                <a16:creationId xmlns:a16="http://schemas.microsoft.com/office/drawing/2014/main" id="{365C56D9-D96A-4262-9D71-520BB0CAF690}"/>
               </a:ext>
             </a:extLst>
           </p:cNvPr>
@@ -12309,7 +12317,7 @@
           <p:cNvPr id="11" name="">
             <a:extLst xmlns:a="http://schemas.openxmlformats.org/drawingml/2006/main">
               <a:ext uri="{FF2B5EF4-FFF2-40B4-BE49-F238E27FC236}">
-                <a16:creationId xmlns:a16="http://schemas.microsoft.com/office/drawing/2014/main" id="{2DED3B79-DFF3-46ED-AC2B-4D9E20459815}"/>
+                <a16:creationId xmlns:a16="http://schemas.microsoft.com/office/drawing/2014/main" id="{8DDF3E4F-3559-4804-B25C-75646DD652A5}"/>
               </a:ext>
             </a:extLst>
           </p:cNvPr>
@@ -12341,7 +12349,7 @@
           <p:cNvPr id="12" name="">
             <a:extLst xmlns:a="http://schemas.openxmlformats.org/drawingml/2006/main">
               <a:ext uri="{FF2B5EF4-FFF2-40B4-BE49-F238E27FC236}">
-                <a16:creationId xmlns:a16="http://schemas.microsoft.com/office/drawing/2014/main" id="{0CAA7B21-F6DB-4585-8D67-7F0FC109323A}"/>
+                <a16:creationId xmlns:a16="http://schemas.microsoft.com/office/drawing/2014/main" id="{D66720DA-29CF-4B49-834D-00398462A468}"/>
               </a:ext>
             </a:extLst>
           </p:cNvPr>
@@ -12398,7 +12406,7 @@
           <p:cNvPr id="13" name="">
             <a:extLst xmlns:a="http://schemas.openxmlformats.org/drawingml/2006/main">
               <a:ext uri="{FF2B5EF4-FFF2-40B4-BE49-F238E27FC236}">
-                <a16:creationId xmlns:a16="http://schemas.microsoft.com/office/drawing/2014/main" id="{83838238-8AAB-40DF-AEB0-634A32364B2E}"/>
+                <a16:creationId xmlns:a16="http://schemas.microsoft.com/office/drawing/2014/main" id="{6941BD55-5FD6-4690-92C3-EBAB3A047974}"/>
               </a:ext>
             </a:extLst>
           </p:cNvPr>
@@ -12455,7 +12463,7 @@
           <p:cNvPr id="14" name="">
             <a:extLst xmlns:a="http://schemas.openxmlformats.org/drawingml/2006/main">
               <a:ext uri="{FF2B5EF4-FFF2-40B4-BE49-F238E27FC236}">
-                <a16:creationId xmlns:a16="http://schemas.microsoft.com/office/drawing/2014/main" id="{E3CB51FA-CB37-4336-880E-4FF9F074E08B}"/>
+                <a16:creationId xmlns:a16="http://schemas.microsoft.com/office/drawing/2014/main" id="{1255D09F-D9B2-499B-B4C2-46ADA615A27E}"/>
               </a:ext>
             </a:extLst>
           </p:cNvPr>
@@ -12489,7 +12497,7 @@
           <p:cNvPr id="15" name="">
             <a:extLst xmlns:a="http://schemas.openxmlformats.org/drawingml/2006/main">
               <a:ext uri="{FF2B5EF4-FFF2-40B4-BE49-F238E27FC236}">
-                <a16:creationId xmlns:a16="http://schemas.microsoft.com/office/drawing/2014/main" id="{DC18A4B0-3FD7-4FBB-8C86-C220E6C9DF9A}"/>
+                <a16:creationId xmlns:a16="http://schemas.microsoft.com/office/drawing/2014/main" id="{E99F85EB-2625-4B64-B874-0B41BE6D4BCF}"/>
               </a:ext>
             </a:extLst>
           </p:cNvPr>
@@ -12521,7 +12529,7 @@
           <p:cNvPr id="16" name="">
             <a:extLst xmlns:a="http://schemas.openxmlformats.org/drawingml/2006/main">
               <a:ext uri="{FF2B5EF4-FFF2-40B4-BE49-F238E27FC236}">
-                <a16:creationId xmlns:a16="http://schemas.microsoft.com/office/drawing/2014/main" id="{64F00D23-DD12-455E-A74B-C9E9FAF9135F}"/>
+                <a16:creationId xmlns:a16="http://schemas.microsoft.com/office/drawing/2014/main" id="{F3EEDB74-3ACF-41FB-A43E-EB1B0784EA96}"/>
               </a:ext>
             </a:extLst>
           </p:cNvPr>
@@ -12578,7 +12586,7 @@
           <p:cNvPr id="17" name="">
             <a:extLst xmlns:a="http://schemas.openxmlformats.org/drawingml/2006/main">
               <a:ext uri="{FF2B5EF4-FFF2-40B4-BE49-F238E27FC236}">
-                <a16:creationId xmlns:a16="http://schemas.microsoft.com/office/drawing/2014/main" id="{6A1445EE-63FD-4754-8A5E-8638D2B8777D}"/>
+                <a16:creationId xmlns:a16="http://schemas.microsoft.com/office/drawing/2014/main" id="{E223D13C-2519-4DCF-9057-59A8DCAAD542}"/>
               </a:ext>
             </a:extLst>
           </p:cNvPr>
@@ -12635,7 +12643,7 @@
           <p:cNvPr id="18" name="">
             <a:extLst xmlns:a="http://schemas.openxmlformats.org/drawingml/2006/main">
               <a:ext uri="{FF2B5EF4-FFF2-40B4-BE49-F238E27FC236}">
-                <a16:creationId xmlns:a16="http://schemas.microsoft.com/office/drawing/2014/main" id="{BFCD6560-8A60-433E-8C07-CF7A5D345C89}"/>
+                <a16:creationId xmlns:a16="http://schemas.microsoft.com/office/drawing/2014/main" id="{F17CC07A-5E23-4CB3-85FB-32CF696D9FFF}"/>
               </a:ext>
             </a:extLst>
           </p:cNvPr>
@@ -12669,7 +12677,7 @@
           <p:cNvPr id="19" name="">
             <a:extLst xmlns:a="http://schemas.openxmlformats.org/drawingml/2006/main">
               <a:ext uri="{FF2B5EF4-FFF2-40B4-BE49-F238E27FC236}">
-                <a16:creationId xmlns:a16="http://schemas.microsoft.com/office/drawing/2014/main" id="{14A481DA-628C-4B15-B5D1-C63FC81BBF15}"/>
+                <a16:creationId xmlns:a16="http://schemas.microsoft.com/office/drawing/2014/main" id="{301AE590-B032-4FAC-AB65-554612FC827A}"/>
               </a:ext>
             </a:extLst>
           </p:cNvPr>
@@ -12701,7 +12709,7 @@
           <p:cNvPr id="20" name="">
             <a:extLst xmlns:a="http://schemas.openxmlformats.org/drawingml/2006/main">
               <a:ext uri="{FF2B5EF4-FFF2-40B4-BE49-F238E27FC236}">
-                <a16:creationId xmlns:a16="http://schemas.microsoft.com/office/drawing/2014/main" id="{8BDE7206-8C8D-40A6-B8F7-F54714D15C01}"/>
+                <a16:creationId xmlns:a16="http://schemas.microsoft.com/office/drawing/2014/main" id="{87EFEDCC-B85B-4F78-A62D-60598CECFA1F}"/>
               </a:ext>
             </a:extLst>
           </p:cNvPr>
@@ -12758,7 +12766,7 @@
           <p:cNvPr id="21" name="">
             <a:extLst xmlns:a="http://schemas.openxmlformats.org/drawingml/2006/main">
               <a:ext uri="{FF2B5EF4-FFF2-40B4-BE49-F238E27FC236}">
-                <a16:creationId xmlns:a16="http://schemas.microsoft.com/office/drawing/2014/main" id="{756BCAC8-3117-484A-823E-03E0E13E1164}"/>
+                <a16:creationId xmlns:a16="http://schemas.microsoft.com/office/drawing/2014/main" id="{1D51E3D1-FF21-4FD8-9E9E-5DB9E73E398E}"/>
               </a:ext>
             </a:extLst>
           </p:cNvPr>
@@ -12815,7 +12823,7 @@
           <p:cNvPr id="22" name="">
             <a:extLst xmlns:a="http://schemas.openxmlformats.org/drawingml/2006/main">
               <a:ext uri="{FF2B5EF4-FFF2-40B4-BE49-F238E27FC236}">
-                <a16:creationId xmlns:a16="http://schemas.microsoft.com/office/drawing/2014/main" id="{77BFC832-E39E-4C92-B780-1C31F9EC7D16}"/>
+                <a16:creationId xmlns:a16="http://schemas.microsoft.com/office/drawing/2014/main" id="{E36740B6-0CBF-4D8E-B3B1-4CE85C02A29F}"/>
               </a:ext>
             </a:extLst>
           </p:cNvPr>
@@ -12870,7 +12878,7 @@
     </p:spTree>
     <p:extLst>
       <p:ext uri="{BB962C8B-B14F-4D97-AF65-F5344CB8AC3E}">
-        <p14:creationId xmlns:p14="http://schemas.microsoft.com/office/powerpoint/2010/main" val="995432341"/>
+        <p14:creationId xmlns:p14="http://schemas.microsoft.com/office/powerpoint/2010/main" val="826245644"/>
       </p:ext>
     </p:extLst>
   </p:cSld>
@@ -13071,7 +13079,7 @@
           <p:cNvPr id="22" name="">
             <a:extLst xmlns:a="http://schemas.openxmlformats.org/drawingml/2006/main">
               <a:ext uri="{FF2B5EF4-FFF2-40B4-BE49-F238E27FC236}">
-                <a16:creationId xmlns:a16="http://schemas.microsoft.com/office/drawing/2014/main" id="{A6BB02F1-EB40-4F44-B4B2-B29B1050D044}"/>
+                <a16:creationId xmlns:a16="http://schemas.microsoft.com/office/drawing/2014/main" id="{0B78DB5E-ACAD-4E55-8CE0-D01F6E7C3875}"/>
               </a:ext>
             </a:extLst>
           </p:cNvPr>
@@ -13103,7 +13111,7 @@
           <p:cNvPr id="2" name="">
             <a:extLst xmlns:a="http://schemas.openxmlformats.org/drawingml/2006/main">
               <a:ext uri="{FF2B5EF4-FFF2-40B4-BE49-F238E27FC236}">
-                <a16:creationId xmlns:a16="http://schemas.microsoft.com/office/drawing/2014/main" id="{B009125E-BCA0-4ED3-9FE2-4B713FC39F4B}"/>
+                <a16:creationId xmlns:a16="http://schemas.microsoft.com/office/drawing/2014/main" id="{84329E61-C968-4922-B33B-830F674321FA}"/>
               </a:ext>
             </a:extLst>
           </p:cNvPr>
@@ -13160,7 +13168,7 @@
           <p:cNvPr id="3" name="">
             <a:extLst xmlns:a="http://schemas.openxmlformats.org/drawingml/2006/main">
               <a:ext uri="{FF2B5EF4-FFF2-40B4-BE49-F238E27FC236}">
-                <a16:creationId xmlns:a16="http://schemas.microsoft.com/office/drawing/2014/main" id="{0B0D8CCA-1E72-40C2-87D2-18A905B2069E}"/>
+                <a16:creationId xmlns:a16="http://schemas.microsoft.com/office/drawing/2014/main" id="{03CCC58C-1AF7-4E85-91CF-FF5C7497F428}"/>
               </a:ext>
             </a:extLst>
           </p:cNvPr>
@@ -13192,7 +13200,7 @@
           <p:cNvPr id="4" name="">
             <a:extLst xmlns:a="http://schemas.openxmlformats.org/drawingml/2006/main">
               <a:ext uri="{FF2B5EF4-FFF2-40B4-BE49-F238E27FC236}">
-                <a16:creationId xmlns:a16="http://schemas.microsoft.com/office/drawing/2014/main" id="{F95491CC-CB5A-4440-BD03-367BF82F3B10}"/>
+                <a16:creationId xmlns:a16="http://schemas.microsoft.com/office/drawing/2014/main" id="{6CEC9853-928C-49D9-B45E-361B2CB896C5}"/>
               </a:ext>
             </a:extLst>
           </p:cNvPr>
@@ -13249,7 +13257,7 @@
           <p:cNvPr id="5" name="">
             <a:extLst xmlns:a="http://schemas.openxmlformats.org/drawingml/2006/main">
               <a:ext uri="{FF2B5EF4-FFF2-40B4-BE49-F238E27FC236}">
-                <a16:creationId xmlns:a16="http://schemas.microsoft.com/office/drawing/2014/main" id="{1160C944-9496-487A-BAFF-9DB41346E9D5}"/>
+                <a16:creationId xmlns:a16="http://schemas.microsoft.com/office/drawing/2014/main" id="{9FB05666-0907-481B-9B27-A573AEFF2D12}"/>
               </a:ext>
             </a:extLst>
           </p:cNvPr>
@@ -13306,7 +13314,7 @@
           <p:cNvPr id="6" name="">
             <a:extLst xmlns:a="http://schemas.openxmlformats.org/drawingml/2006/main">
               <a:ext uri="{FF2B5EF4-FFF2-40B4-BE49-F238E27FC236}">
-                <a16:creationId xmlns:a16="http://schemas.microsoft.com/office/drawing/2014/main" id="{DA7E7BCA-430A-4CE4-BBCB-CDBCB6460DEF}"/>
+                <a16:creationId xmlns:a16="http://schemas.microsoft.com/office/drawing/2014/main" id="{B3226E54-DEAD-4F1C-B248-8A51085B6738}"/>
               </a:ext>
             </a:extLst>
           </p:cNvPr>
@@ -13363,7 +13371,7 @@
           <p:cNvPr id="7" name="">
             <a:extLst xmlns:a="http://schemas.openxmlformats.org/drawingml/2006/main">
               <a:ext uri="{FF2B5EF4-FFF2-40B4-BE49-F238E27FC236}">
-                <a16:creationId xmlns:a16="http://schemas.microsoft.com/office/drawing/2014/main" id="{2BECE004-1C35-4823-8F1A-E43C1EE19394}"/>
+                <a16:creationId xmlns:a16="http://schemas.microsoft.com/office/drawing/2014/main" id="{1BE21C04-03B0-4A7E-A88F-3777E4056F55}"/>
               </a:ext>
             </a:extLst>
           </p:cNvPr>
@@ -13395,7 +13403,7 @@
           <p:cNvPr id="8" name="">
             <a:extLst xmlns:a="http://schemas.openxmlformats.org/drawingml/2006/main">
               <a:ext uri="{FF2B5EF4-FFF2-40B4-BE49-F238E27FC236}">
-                <a16:creationId xmlns:a16="http://schemas.microsoft.com/office/drawing/2014/main" id="{A98B591D-F95E-4E58-9613-AA644D671304}"/>
+                <a16:creationId xmlns:a16="http://schemas.microsoft.com/office/drawing/2014/main" id="{1B96EFE3-AE82-4E98-AE0E-46C055443CA2}"/>
               </a:ext>
             </a:extLst>
           </p:cNvPr>
@@ -13452,7 +13460,7 @@
           <p:cNvPr id="9" name="">
             <a:extLst xmlns:a="http://schemas.openxmlformats.org/drawingml/2006/main">
               <a:ext uri="{FF2B5EF4-FFF2-40B4-BE49-F238E27FC236}">
-                <a16:creationId xmlns:a16="http://schemas.microsoft.com/office/drawing/2014/main" id="{255A83AF-77B4-4882-8129-9EB11DD4A9E6}"/>
+                <a16:creationId xmlns:a16="http://schemas.microsoft.com/office/drawing/2014/main" id="{964777FC-8701-4364-86F7-F39A51F9A2D3}"/>
               </a:ext>
             </a:extLst>
           </p:cNvPr>
@@ -13509,7 +13517,7 @@
           <p:cNvPr id="10" name="">
             <a:extLst xmlns:a="http://schemas.openxmlformats.org/drawingml/2006/main">
               <a:ext uri="{FF2B5EF4-FFF2-40B4-BE49-F238E27FC236}">
-                <a16:creationId xmlns:a16="http://schemas.microsoft.com/office/drawing/2014/main" id="{38320245-06D4-470B-8C12-654195AF495E}"/>
+                <a16:creationId xmlns:a16="http://schemas.microsoft.com/office/drawing/2014/main" id="{52B29271-BB5D-44A4-8B4A-F78EFA040C33}"/>
               </a:ext>
             </a:extLst>
           </p:cNvPr>
@@ -13543,7 +13551,7 @@
           <p:cNvPr id="11" name="">
             <a:extLst xmlns:a="http://schemas.openxmlformats.org/drawingml/2006/main">
               <a:ext uri="{FF2B5EF4-FFF2-40B4-BE49-F238E27FC236}">
-                <a16:creationId xmlns:a16="http://schemas.microsoft.com/office/drawing/2014/main" id="{DF356061-1423-4D24-8C9A-3EB9FA120741}"/>
+                <a16:creationId xmlns:a16="http://schemas.microsoft.com/office/drawing/2014/main" id="{5ACA86DC-092C-4186-97F2-12C44F0BEB63}"/>
               </a:ext>
             </a:extLst>
           </p:cNvPr>
@@ -13575,7 +13583,7 @@
           <p:cNvPr id="12" name="">
             <a:extLst xmlns:a="http://schemas.openxmlformats.org/drawingml/2006/main">
               <a:ext uri="{FF2B5EF4-FFF2-40B4-BE49-F238E27FC236}">
-                <a16:creationId xmlns:a16="http://schemas.microsoft.com/office/drawing/2014/main" id="{42491F43-7AE7-47C5-BDB0-2D43C67AA2A4}"/>
+                <a16:creationId xmlns:a16="http://schemas.microsoft.com/office/drawing/2014/main" id="{D4976995-7290-4B8E-AB21-4E5F626128F7}"/>
               </a:ext>
             </a:extLst>
           </p:cNvPr>
@@ -13632,7 +13640,7 @@
           <p:cNvPr id="13" name="">
             <a:extLst xmlns:a="http://schemas.openxmlformats.org/drawingml/2006/main">
               <a:ext uri="{FF2B5EF4-FFF2-40B4-BE49-F238E27FC236}">
-                <a16:creationId xmlns:a16="http://schemas.microsoft.com/office/drawing/2014/main" id="{7EC5068F-90AE-471D-8657-0140C4414AD8}"/>
+                <a16:creationId xmlns:a16="http://schemas.microsoft.com/office/drawing/2014/main" id="{3F4355DB-0904-428A-93F8-8EE8ACF996FF}"/>
               </a:ext>
             </a:extLst>
           </p:cNvPr>
@@ -13689,7 +13697,7 @@
           <p:cNvPr id="14" name="">
             <a:extLst xmlns:a="http://schemas.openxmlformats.org/drawingml/2006/main">
               <a:ext uri="{FF2B5EF4-FFF2-40B4-BE49-F238E27FC236}">
-                <a16:creationId xmlns:a16="http://schemas.microsoft.com/office/drawing/2014/main" id="{29C43854-079A-401A-B991-4A80585D50D9}"/>
+                <a16:creationId xmlns:a16="http://schemas.microsoft.com/office/drawing/2014/main" id="{829C6E48-5D39-4907-9F0A-50BC1ED3C23A}"/>
               </a:ext>
             </a:extLst>
           </p:cNvPr>
@@ -13723,7 +13731,7 @@
           <p:cNvPr id="15" name="">
             <a:extLst xmlns:a="http://schemas.openxmlformats.org/drawingml/2006/main">
               <a:ext uri="{FF2B5EF4-FFF2-40B4-BE49-F238E27FC236}">
-                <a16:creationId xmlns:a16="http://schemas.microsoft.com/office/drawing/2014/main" id="{B13BAE3F-ECD3-4491-B88C-4BA2D89E61D5}"/>
+                <a16:creationId xmlns:a16="http://schemas.microsoft.com/office/drawing/2014/main" id="{471D2528-0DC7-4385-A65D-DEF85C8D8BBC}"/>
               </a:ext>
             </a:extLst>
           </p:cNvPr>
@@ -13755,7 +13763,7 @@
           <p:cNvPr id="16" name="">
             <a:extLst xmlns:a="http://schemas.openxmlformats.org/drawingml/2006/main">
               <a:ext uri="{FF2B5EF4-FFF2-40B4-BE49-F238E27FC236}">
-                <a16:creationId xmlns:a16="http://schemas.microsoft.com/office/drawing/2014/main" id="{E09E1710-30F6-470F-A66D-A38881F16EC9}"/>
+                <a16:creationId xmlns:a16="http://schemas.microsoft.com/office/drawing/2014/main" id="{8D9B93C6-5360-4A0C-A78E-B4B6CB59FF92}"/>
               </a:ext>
             </a:extLst>
           </p:cNvPr>
@@ -13812,7 +13820,7 @@
           <p:cNvPr id="17" name="">
             <a:extLst xmlns:a="http://schemas.openxmlformats.org/drawingml/2006/main">
               <a:ext uri="{FF2B5EF4-FFF2-40B4-BE49-F238E27FC236}">
-                <a16:creationId xmlns:a16="http://schemas.microsoft.com/office/drawing/2014/main" id="{61A5C2B5-4E3D-4C1C-82F6-9FF376097F4E}"/>
+                <a16:creationId xmlns:a16="http://schemas.microsoft.com/office/drawing/2014/main" id="{E23EA0A1-0F83-4574-B0BE-3C1262DA841F}"/>
               </a:ext>
             </a:extLst>
           </p:cNvPr>
@@ -13869,7 +13877,7 @@
           <p:cNvPr id="18" name="">
             <a:extLst xmlns:a="http://schemas.openxmlformats.org/drawingml/2006/main">
               <a:ext uri="{FF2B5EF4-FFF2-40B4-BE49-F238E27FC236}">
-                <a16:creationId xmlns:a16="http://schemas.microsoft.com/office/drawing/2014/main" id="{F833DE1B-0CF2-4AC3-9590-9568D59A6CC8}"/>
+                <a16:creationId xmlns:a16="http://schemas.microsoft.com/office/drawing/2014/main" id="{B8E9F36A-B147-4EC4-BA78-9FF2F7F6BB5C}"/>
               </a:ext>
             </a:extLst>
           </p:cNvPr>
@@ -13903,7 +13911,7 @@
           <p:cNvPr id="19" name="">
             <a:extLst xmlns:a="http://schemas.openxmlformats.org/drawingml/2006/main">
               <a:ext uri="{FF2B5EF4-FFF2-40B4-BE49-F238E27FC236}">
-                <a16:creationId xmlns:a16="http://schemas.microsoft.com/office/drawing/2014/main" id="{E944C096-97C9-4A5B-AA54-1703F80B4B06}"/>
+                <a16:creationId xmlns:a16="http://schemas.microsoft.com/office/drawing/2014/main" id="{864D8AF8-6D50-47A3-9FE4-335F9A3230FA}"/>
               </a:ext>
             </a:extLst>
           </p:cNvPr>
@@ -13935,7 +13943,7 @@
           <p:cNvPr id="20" name="">
             <a:extLst xmlns:a="http://schemas.openxmlformats.org/drawingml/2006/main">
               <a:ext uri="{FF2B5EF4-FFF2-40B4-BE49-F238E27FC236}">
-                <a16:creationId xmlns:a16="http://schemas.microsoft.com/office/drawing/2014/main" id="{30F29063-84EE-44F0-8AA3-E21FB439AA7A}"/>
+                <a16:creationId xmlns:a16="http://schemas.microsoft.com/office/drawing/2014/main" id="{AAC5B7CF-2419-4100-AC1F-E8A42DFAB7AD}"/>
               </a:ext>
             </a:extLst>
           </p:cNvPr>
@@ -13992,7 +14000,7 @@
           <p:cNvPr id="21" name="">
             <a:extLst xmlns:a="http://schemas.openxmlformats.org/drawingml/2006/main">
               <a:ext uri="{FF2B5EF4-FFF2-40B4-BE49-F238E27FC236}">
-                <a16:creationId xmlns:a16="http://schemas.microsoft.com/office/drawing/2014/main" id="{A6F83B33-37E6-4A13-A42B-548F6F732538}"/>
+                <a16:creationId xmlns:a16="http://schemas.microsoft.com/office/drawing/2014/main" id="{4D5B86DF-FE07-48B7-8E88-3E5F4D355757}"/>
               </a:ext>
             </a:extLst>
           </p:cNvPr>
@@ -14047,7 +14055,7 @@
     </p:spTree>
     <p:extLst>
       <p:ext uri="{BB962C8B-B14F-4D97-AF65-F5344CB8AC3E}">
-        <p14:creationId xmlns:p14="http://schemas.microsoft.com/office/powerpoint/2010/main" val="1061520031"/>
+        <p14:creationId xmlns:p14="http://schemas.microsoft.com/office/powerpoint/2010/main" val="1192345268"/>
       </p:ext>
     </p:extLst>
   </p:cSld>
